--- a/docs/tutoriais/Tutorial-Admin.pptx
+++ b/docs/tutoriais/Tutorial-Admin.pptx
@@ -2064,7 +2064,7 @@
         <p:spPr>
           <a:xfrm>
             <a:off x="822960" y="5349240"/>
-            <a:ext cx="4114800" cy="457200"/>
+            <a:ext cx="4480560" cy="457200"/>
           </a:xfrm>
           <a:prstGeom prst="roundRect">
             <a:avLst>
@@ -2091,7 +2091,7 @@
         <p:spPr>
           <a:xfrm>
             <a:off x="822960" y="5349240"/>
-            <a:ext cx="4114800" cy="457200"/>
+            <a:ext cx="4480560" cy="457200"/>
           </a:xfrm>
           <a:prstGeom prst="rect">
             <a:avLst/>
@@ -2239,7 +2239,7 @@
                 <a:ea typeface="Calibri" pitchFamily="34" charset="-122"/>
                 <a:cs typeface="Calibri" pitchFamily="34" charset="-120"/>
               </a:rPr>
-              <a:t>CONTROLE</a:t>
+              <a:t>VÍDEOS</a:t>
             </a:r>
             <a:endParaRPr lang="en-US" sz="1200" dirty="0"/>
           </a:p>
@@ -2278,7 +2278,7 @@
                 <a:ea typeface="Calibri" pitchFamily="34" charset="-122"/>
                 <a:cs typeface="Calibri" pitchFamily="34" charset="-120"/>
               </a:rPr>
-              <a:t>8. Notificações e crons</a:t>
+              <a:t>8. Vídeos: quem faz o quê</a:t>
             </a:r>
             <a:endParaRPr lang="en-US" sz="3000" dirty="0"/>
           </a:p>
@@ -2286,18 +2286,422 @@
       </p:sp>
       <p:sp>
         <p:nvSpPr>
-          <p:cNvPr id="4" name="Shape 2"/>
-          <p:cNvSpPr/>
-          <p:nvPr/>
-        </p:nvSpPr>
-        <p:spPr>
-          <a:xfrm>
-            <a:off x="640080" y="1645920"/>
-            <a:ext cx="10972800" cy="1828800"/>
+          <p:cNvPr id="4" name="Text 2"/>
+          <p:cNvSpPr/>
+          <p:nvPr/>
+        </p:nvSpPr>
+        <p:spPr>
+          <a:xfrm>
+            <a:off x="640080" y="1691640"/>
+            <a:ext cx="7315200" cy="640080"/>
+          </a:xfrm>
+          <a:prstGeom prst="rect">
+            <a:avLst/>
+          </a:prstGeom>
+          <a:noFill/>
+          <a:ln/>
+        </p:spPr>
+        <p:txBody>
+          <a:bodyPr wrap="square" lIns="0" tIns="0" rIns="0" bIns="0" rtlCol="0" anchor="ctr"/>
+          <a:lstStyle/>
+          <a:p>
+            <a:pPr indent="0" marL="0">
+              <a:buNone/>
+            </a:pPr>
+            <a:r>
+              <a:rPr lang="en-US" sz="1350" dirty="0">
+                <a:solidFill>
+                  <a:srgbClr val="E8EEF7"/>
+                </a:solidFill>
+                <a:latin typeface="Calibri" pitchFamily="34" charset="0"/>
+                <a:ea typeface="Calibri" pitchFamily="34" charset="-122"/>
+                <a:cs typeface="Calibri" pitchFamily="34" charset="-120"/>
+              </a:rPr>
+              <a:t>Disponibilizar o vídeo (com descrição) e novas versões</a:t>
+            </a:r>
+            <a:endParaRPr lang="en-US" sz="1350" dirty="0"/>
+          </a:p>
+        </p:txBody>
+      </p:sp>
+      <p:sp>
+        <p:nvSpPr>
+          <p:cNvPr id="5" name="Text 3"/>
+          <p:cNvSpPr/>
+          <p:nvPr/>
+        </p:nvSpPr>
+        <p:spPr>
+          <a:xfrm>
+            <a:off x="8138160" y="1691640"/>
+            <a:ext cx="3474720" cy="640080"/>
+          </a:xfrm>
+          <a:prstGeom prst="rect">
+            <a:avLst/>
+          </a:prstGeom>
+          <a:noFill/>
+          <a:ln/>
+        </p:spPr>
+        <p:txBody>
+          <a:bodyPr wrap="square" lIns="0" tIns="0" rIns="0" bIns="0" rtlCol="0" anchor="ctr"/>
+          <a:lstStyle/>
+          <a:p>
+            <a:pPr indent="0" marL="0">
+              <a:buNone/>
+            </a:pPr>
+            <a:r>
+              <a:rPr lang="en-US" sz="1350" b="1" dirty="0">
+                <a:solidFill>
+                  <a:srgbClr val="22D3EE"/>
+                </a:solidFill>
+                <a:latin typeface="Calibri" pitchFamily="34" charset="0"/>
+                <a:ea typeface="Calibri" pitchFamily="34" charset="-122"/>
+                <a:cs typeface="Calibri" pitchFamily="34" charset="-120"/>
+              </a:rPr>
+              <a:t>MB Estúdios</a:t>
+            </a:r>
+            <a:endParaRPr lang="en-US" sz="1350" dirty="0"/>
+          </a:p>
+        </p:txBody>
+      </p:sp>
+      <p:sp>
+        <p:nvSpPr>
+          <p:cNvPr id="6" name="Shape 4"/>
+          <p:cNvSpPr/>
+          <p:nvPr/>
+        </p:nvSpPr>
+        <p:spPr>
+          <a:xfrm>
+            <a:off x="640080" y="2368296"/>
+            <a:ext cx="10972800" cy="0"/>
+          </a:xfrm>
+          <a:prstGeom prst="line">
+            <a:avLst/>
+          </a:prstGeom>
+          <a:noFill/>
+          <a:ln w="9525">
+            <a:solidFill>
+              <a:srgbClr val="1D3A5F"/>
+            </a:solidFill>
+            <a:prstDash val="solid"/>
+          </a:ln>
+        </p:spPr>
+      </p:sp>
+      <p:sp>
+        <p:nvSpPr>
+          <p:cNvPr id="7" name="Text 5"/>
+          <p:cNvSpPr/>
+          <p:nvPr/>
+        </p:nvSpPr>
+        <p:spPr>
+          <a:xfrm>
+            <a:off x="640080" y="2423160"/>
+            <a:ext cx="7315200" cy="640080"/>
+          </a:xfrm>
+          <a:prstGeom prst="rect">
+            <a:avLst/>
+          </a:prstGeom>
+          <a:noFill/>
+          <a:ln/>
+        </p:spPr>
+        <p:txBody>
+          <a:bodyPr wrap="square" lIns="0" tIns="0" rIns="0" bIns="0" rtlCol="0" anchor="ctr"/>
+          <a:lstStyle/>
+          <a:p>
+            <a:pPr indent="0" marL="0">
+              <a:buNone/>
+            </a:pPr>
+            <a:r>
+              <a:rPr lang="en-US" sz="1350" dirty="0">
+                <a:solidFill>
+                  <a:srgbClr val="E8EEF7"/>
+                </a:solidFill>
+                <a:latin typeface="Calibri" pitchFamily="34" charset="0"/>
+                <a:ea typeface="Calibri" pitchFamily="34" charset="-122"/>
+                <a:cs typeface="Calibri" pitchFamily="34" charset="-120"/>
+              </a:rPr>
+              <a:t>Assistir, marcar os pontos com problema e aprovar</a:t>
+            </a:r>
+            <a:endParaRPr lang="en-US" sz="1350" dirty="0"/>
+          </a:p>
+        </p:txBody>
+      </p:sp>
+      <p:sp>
+        <p:nvSpPr>
+          <p:cNvPr id="8" name="Text 6"/>
+          <p:cNvSpPr/>
+          <p:nvPr/>
+        </p:nvSpPr>
+        <p:spPr>
+          <a:xfrm>
+            <a:off x="8138160" y="2423160"/>
+            <a:ext cx="3474720" cy="640080"/>
+          </a:xfrm>
+          <a:prstGeom prst="rect">
+            <a:avLst/>
+          </a:prstGeom>
+          <a:noFill/>
+          <a:ln/>
+        </p:spPr>
+        <p:txBody>
+          <a:bodyPr wrap="square" lIns="0" tIns="0" rIns="0" bIns="0" rtlCol="0" anchor="ctr"/>
+          <a:lstStyle/>
+          <a:p>
+            <a:pPr indent="0" marL="0">
+              <a:buNone/>
+            </a:pPr>
+            <a:r>
+              <a:rPr lang="en-US" sz="1350" b="1" dirty="0">
+                <a:solidFill>
+                  <a:srgbClr val="22D3EE"/>
+                </a:solidFill>
+                <a:latin typeface="Calibri" pitchFamily="34" charset="0"/>
+                <a:ea typeface="Calibri" pitchFamily="34" charset="-122"/>
+                <a:cs typeface="Calibri" pitchFamily="34" charset="-120"/>
+              </a:rPr>
+              <a:t>Formador(a) do curso</a:t>
+            </a:r>
+            <a:endParaRPr lang="en-US" sz="1350" dirty="0"/>
+          </a:p>
+        </p:txBody>
+      </p:sp>
+      <p:sp>
+        <p:nvSpPr>
+          <p:cNvPr id="9" name="Shape 7"/>
+          <p:cNvSpPr/>
+          <p:nvPr/>
+        </p:nvSpPr>
+        <p:spPr>
+          <a:xfrm>
+            <a:off x="640080" y="3099816"/>
+            <a:ext cx="10972800" cy="0"/>
+          </a:xfrm>
+          <a:prstGeom prst="line">
+            <a:avLst/>
+          </a:prstGeom>
+          <a:noFill/>
+          <a:ln w="9525">
+            <a:solidFill>
+              <a:srgbClr val="1D3A5F"/>
+            </a:solidFill>
+            <a:prstDash val="solid"/>
+          </a:ln>
+        </p:spPr>
+      </p:sp>
+      <p:sp>
+        <p:nvSpPr>
+          <p:cNvPr id="10" name="Text 8"/>
+          <p:cNvSpPr/>
+          <p:nvPr/>
+        </p:nvSpPr>
+        <p:spPr>
+          <a:xfrm>
+            <a:off x="640080" y="3154680"/>
+            <a:ext cx="7315200" cy="640080"/>
+          </a:xfrm>
+          <a:prstGeom prst="rect">
+            <a:avLst/>
+          </a:prstGeom>
+          <a:noFill/>
+          <a:ln/>
+        </p:spPr>
+        <p:txBody>
+          <a:bodyPr wrap="square" lIns="0" tIns="0" rIns="0" bIns="0" rtlCol="0" anchor="ctr"/>
+          <a:lstStyle/>
+          <a:p>
+            <a:pPr indent="0" marL="0">
+              <a:buNone/>
+            </a:pPr>
+            <a:r>
+              <a:rPr lang="en-US" sz="1350" dirty="0">
+                <a:solidFill>
+                  <a:srgbClr val="E8EEF7"/>
+                </a:solidFill>
+                <a:latin typeface="Calibri" pitchFamily="34" charset="0"/>
+                <a:ea typeface="Calibri" pitchFamily="34" charset="-122"/>
+                <a:cs typeface="Calibri" pitchFamily="34" charset="-120"/>
+              </a:rPr>
+              <a:t>Responder apontamentos e marcar Em correção / Corrigido</a:t>
+            </a:r>
+            <a:endParaRPr lang="en-US" sz="1350" dirty="0"/>
+          </a:p>
+        </p:txBody>
+      </p:sp>
+      <p:sp>
+        <p:nvSpPr>
+          <p:cNvPr id="11" name="Text 9"/>
+          <p:cNvSpPr/>
+          <p:nvPr/>
+        </p:nvSpPr>
+        <p:spPr>
+          <a:xfrm>
+            <a:off x="8138160" y="3154680"/>
+            <a:ext cx="3474720" cy="640080"/>
+          </a:xfrm>
+          <a:prstGeom prst="rect">
+            <a:avLst/>
+          </a:prstGeom>
+          <a:noFill/>
+          <a:ln/>
+        </p:spPr>
+        <p:txBody>
+          <a:bodyPr wrap="square" lIns="0" tIns="0" rIns="0" bIns="0" rtlCol="0" anchor="ctr"/>
+          <a:lstStyle/>
+          <a:p>
+            <a:pPr indent="0" marL="0">
+              <a:buNone/>
+            </a:pPr>
+            <a:r>
+              <a:rPr lang="en-US" sz="1350" b="1" dirty="0">
+                <a:solidFill>
+                  <a:srgbClr val="22D3EE"/>
+                </a:solidFill>
+                <a:latin typeface="Calibri" pitchFamily="34" charset="0"/>
+                <a:ea typeface="Calibri" pitchFamily="34" charset="-122"/>
+                <a:cs typeface="Calibri" pitchFamily="34" charset="-120"/>
+              </a:rPr>
+              <a:t>MB Estúdios</a:t>
+            </a:r>
+            <a:endParaRPr lang="en-US" sz="1350" dirty="0"/>
+          </a:p>
+        </p:txBody>
+      </p:sp>
+      <p:sp>
+        <p:nvSpPr>
+          <p:cNvPr id="12" name="Shape 10"/>
+          <p:cNvSpPr/>
+          <p:nvPr/>
+        </p:nvSpPr>
+        <p:spPr>
+          <a:xfrm>
+            <a:off x="640080" y="3831336"/>
+            <a:ext cx="10972800" cy="0"/>
+          </a:xfrm>
+          <a:prstGeom prst="line">
+            <a:avLst/>
+          </a:prstGeom>
+          <a:noFill/>
+          <a:ln w="9525">
+            <a:solidFill>
+              <a:srgbClr val="1D3A5F"/>
+            </a:solidFill>
+            <a:prstDash val="solid"/>
+          </a:ln>
+        </p:spPr>
+      </p:sp>
+      <p:sp>
+        <p:nvSpPr>
+          <p:cNvPr id="13" name="Text 11"/>
+          <p:cNvSpPr/>
+          <p:nvPr/>
+        </p:nvSpPr>
+        <p:spPr>
+          <a:xfrm>
+            <a:off x="640080" y="3886200"/>
+            <a:ext cx="7315200" cy="640080"/>
+          </a:xfrm>
+          <a:prstGeom prst="rect">
+            <a:avLst/>
+          </a:prstGeom>
+          <a:noFill/>
+          <a:ln/>
+        </p:spPr>
+        <p:txBody>
+          <a:bodyPr wrap="square" lIns="0" tIns="0" rIns="0" bIns="0" rtlCol="0" anchor="ctr"/>
+          <a:lstStyle/>
+          <a:p>
+            <a:pPr indent="0" marL="0">
+              <a:buNone/>
+            </a:pPr>
+            <a:r>
+              <a:rPr lang="en-US" sz="1350" dirty="0">
+                <a:solidFill>
+                  <a:srgbClr val="E8EEF7"/>
+                </a:solidFill>
+                <a:latin typeface="Calibri" pitchFamily="34" charset="0"/>
+                <a:ea typeface="Calibri" pitchFamily="34" charset="-122"/>
+                <a:cs typeface="Calibri" pitchFamily="34" charset="-120"/>
+              </a:rPr>
+              <a:t>Acompanhar e receber cópia dos e-mails</a:t>
+            </a:r>
+            <a:endParaRPr lang="en-US" sz="1350" dirty="0"/>
+          </a:p>
+        </p:txBody>
+      </p:sp>
+      <p:sp>
+        <p:nvSpPr>
+          <p:cNvPr id="14" name="Text 12"/>
+          <p:cNvSpPr/>
+          <p:nvPr/>
+        </p:nvSpPr>
+        <p:spPr>
+          <a:xfrm>
+            <a:off x="8138160" y="3886200"/>
+            <a:ext cx="3474720" cy="640080"/>
+          </a:xfrm>
+          <a:prstGeom prst="rect">
+            <a:avLst/>
+          </a:prstGeom>
+          <a:noFill/>
+          <a:ln/>
+        </p:spPr>
+        <p:txBody>
+          <a:bodyPr wrap="square" lIns="0" tIns="0" rIns="0" bIns="0" rtlCol="0" anchor="ctr"/>
+          <a:lstStyle/>
+          <a:p>
+            <a:pPr indent="0" marL="0">
+              <a:buNone/>
+            </a:pPr>
+            <a:r>
+              <a:rPr lang="en-US" sz="1350" b="1" dirty="0">
+                <a:solidFill>
+                  <a:srgbClr val="22D3EE"/>
+                </a:solidFill>
+                <a:latin typeface="Calibri" pitchFamily="34" charset="0"/>
+                <a:ea typeface="Calibri" pitchFamily="34" charset="-122"/>
+                <a:cs typeface="Calibri" pitchFamily="34" charset="-120"/>
+              </a:rPr>
+              <a:t>Equipe TI</a:t>
+            </a:r>
+            <a:endParaRPr lang="en-US" sz="1350" dirty="0"/>
+          </a:p>
+        </p:txBody>
+      </p:sp>
+      <p:sp>
+        <p:nvSpPr>
+          <p:cNvPr id="15" name="Shape 13"/>
+          <p:cNvSpPr/>
+          <p:nvPr/>
+        </p:nvSpPr>
+        <p:spPr>
+          <a:xfrm>
+            <a:off x="640080" y="4562856"/>
+            <a:ext cx="10972800" cy="0"/>
+          </a:xfrm>
+          <a:prstGeom prst="line">
+            <a:avLst/>
+          </a:prstGeom>
+          <a:noFill/>
+          <a:ln w="9525">
+            <a:solidFill>
+              <a:srgbClr val="1D3A5F"/>
+            </a:solidFill>
+            <a:prstDash val="solid"/>
+          </a:ln>
+        </p:spPr>
+      </p:sp>
+      <p:sp>
+        <p:nvSpPr>
+          <p:cNvPr id="16" name="Shape 14"/>
+          <p:cNvSpPr/>
+          <p:nvPr/>
+        </p:nvSpPr>
+        <p:spPr>
+          <a:xfrm>
+            <a:off x="640080" y="4846320"/>
+            <a:ext cx="10972800" cy="1280160"/>
           </a:xfrm>
           <a:prstGeom prst="roundRect">
             <a:avLst>
-              <a:gd name="adj" fmla="val 4500"/>
+              <a:gd name="adj" fmla="val 6429"/>
             </a:avLst>
           </a:prstGeom>
           <a:solidFill>
@@ -2313,13 +2717,13 @@
       </p:sp>
       <p:sp>
         <p:nvSpPr>
-          <p:cNvPr id="5" name="Text 3"/>
-          <p:cNvSpPr/>
-          <p:nvPr/>
-        </p:nvSpPr>
-        <p:spPr>
-          <a:xfrm>
-            <a:off x="841248" y="1792224"/>
+          <p:cNvPr id="17" name="Text 15"/>
+          <p:cNvSpPr/>
+          <p:nvPr/>
+        </p:nvSpPr>
+        <p:spPr>
+          <a:xfrm>
+            <a:off x="841248" y="4992624"/>
             <a:ext cx="10570464" cy="329184"/>
           </a:xfrm>
           <a:prstGeom prst="rect">
@@ -2344,7 +2748,7 @@
                 <a:ea typeface="Calibri" pitchFamily="34" charset="-122"/>
                 <a:cs typeface="Calibri" pitchFamily="34" charset="-120"/>
               </a:rPr>
-              <a:t>A fila de e-mails (Admin → Notificações)</a:t>
+              <a:t>Armazenamento e limites</a:t>
             </a:r>
             <a:endParaRPr lang="en-US" sz="1400" dirty="0"/>
           </a:p>
@@ -2352,14 +2756,14 @@
       </p:sp>
       <p:sp>
         <p:nvSpPr>
-          <p:cNvPr id="6" name="Text 4"/>
-          <p:cNvSpPr/>
-          <p:nvPr/>
-        </p:nvSpPr>
-        <p:spPr>
-          <a:xfrm>
-            <a:off x="841248" y="2121408"/>
-            <a:ext cx="10570464" cy="1225296"/>
+          <p:cNvPr id="18" name="Text 16"/>
+          <p:cNvSpPr/>
+          <p:nvPr/>
+        </p:nvSpPr>
+        <p:spPr>
+          <a:xfrm>
+            <a:off x="841248" y="5321808"/>
+            <a:ext cx="10570464" cy="676656"/>
           </a:xfrm>
           <a:prstGeom prst="rect">
             <a:avLst/>
@@ -2386,7 +2790,7 @@
                 <a:ea typeface="Calibri" pitchFamily="34" charset="-122"/>
                 <a:cs typeface="Calibri" pitchFamily="34" charset="-120"/>
               </a:rPr>
-              <a:t>Cada aviso aparece com o status ENVIADO, PENDENTE ou ERRO. Os e-mails saem na hora da ação; se algum falhar, o cron de 5 minutos reenvia. Nesta tela dá para processar a fila manualmente e ver o erro exato de cada mensagem.</a:t>
+              <a:t>Os vídeos ficam em storage/videos/ (fora da pasta pública) e as capturas em storage/videos/&lt;id_curso&gt;/capturas/. Para vídeos grandes, confira no cPanel → MultiPHP INI Editor se upload_max_filesize e post_max_size estão em 512M.</a:t>
             </a:r>
             <a:endParaRPr lang="en-US" sz="1300" dirty="0"/>
           </a:p>
@@ -2394,184 +2798,7 @@
       </p:sp>
       <p:sp>
         <p:nvSpPr>
-          <p:cNvPr id="7" name="Shape 5"/>
-          <p:cNvSpPr/>
-          <p:nvPr/>
-        </p:nvSpPr>
-        <p:spPr>
-          <a:xfrm>
-            <a:off x="640080" y="3749040"/>
-            <a:ext cx="10972800" cy="2194560"/>
-          </a:xfrm>
-          <a:prstGeom prst="roundRect">
-            <a:avLst>
-              <a:gd name="adj" fmla="val 3750"/>
-            </a:avLst>
-          </a:prstGeom>
-          <a:solidFill>
-            <a:srgbClr val="07101F"/>
-          </a:solidFill>
-          <a:ln w="12700">
-            <a:solidFill>
-              <a:srgbClr val="1D3A5F"/>
-            </a:solidFill>
-            <a:prstDash val="solid"/>
-          </a:ln>
-        </p:spPr>
-      </p:sp>
-      <p:sp>
-        <p:nvSpPr>
-          <p:cNvPr id="8" name="Text 6"/>
-          <p:cNvSpPr/>
-          <p:nvPr/>
-        </p:nvSpPr>
-        <p:spPr>
-          <a:xfrm>
-            <a:off x="868680" y="3931920"/>
-            <a:ext cx="10058400" cy="320040"/>
-          </a:xfrm>
-          <a:prstGeom prst="rect">
-            <a:avLst/>
-          </a:prstGeom>
-          <a:noFill/>
-          <a:ln/>
-        </p:spPr>
-        <p:txBody>
-          <a:bodyPr wrap="square" lIns="0" tIns="0" rIns="0" bIns="0" rtlCol="0" anchor="ctr"/>
-          <a:lstStyle/>
-          <a:p>
-            <a:pPr indent="0" marL="0">
-              <a:buNone/>
-            </a:pPr>
-            <a:r>
-              <a:rPr lang="en-US" sz="1300" b="1" dirty="0">
-                <a:solidFill>
-                  <a:srgbClr val="22D3EE"/>
-                </a:solidFill>
-                <a:latin typeface="Calibri" pitchFamily="34" charset="0"/>
-                <a:ea typeface="Calibri" pitchFamily="34" charset="-122"/>
-                <a:cs typeface="Calibri" pitchFamily="34" charset="-120"/>
-              </a:rPr>
-              <a:t>Configuração no cPanel → Cron Jobs</a:t>
-            </a:r>
-            <a:endParaRPr lang="en-US" sz="1300" dirty="0"/>
-          </a:p>
-        </p:txBody>
-      </p:sp>
-      <p:sp>
-        <p:nvSpPr>
-          <p:cNvPr id="9" name="Text 7"/>
-          <p:cNvSpPr/>
-          <p:nvPr/>
-        </p:nvSpPr>
-        <p:spPr>
-          <a:xfrm>
-            <a:off x="868680" y="4343400"/>
-            <a:ext cx="10424160" cy="1554480"/>
-          </a:xfrm>
-          <a:prstGeom prst="rect">
-            <a:avLst/>
-          </a:prstGeom>
-          <a:noFill/>
-          <a:ln/>
-        </p:spPr>
-        <p:txBody>
-          <a:bodyPr wrap="square" lIns="0" tIns="0" rIns="0" bIns="0" rtlCol="0" anchor="t"/>
-          <a:lstStyle/>
-          <a:p>
-            <a:pPr indent="0" marL="0">
-              <a:lnSpc>
-                <a:spcPct val="120000"/>
-              </a:lnSpc>
-              <a:buNone/>
-            </a:pPr>
-            <a:r>
-              <a:rPr lang="en-US" sz="1200" dirty="0">
-                <a:solidFill>
-                  <a:srgbClr val="E8EEF7"/>
-                </a:solidFill>
-                <a:latin typeface="Courier New" pitchFamily="34" charset="0"/>
-                <a:ea typeface="Courier New" pitchFamily="34" charset="-122"/>
-                <a:cs typeface="Courier New" pitchFamily="34" charset="-120"/>
-              </a:rPr>
-              <a:t># a cada 5 minutos — reenvio da fila de e-mails</a:t>
-            </a:r>
-            <a:endParaRPr lang="en-US" sz="1200" dirty="0"/>
-          </a:p>
-          <a:p>
-            <a:pPr indent="0" marL="0">
-              <a:lnSpc>
-                <a:spcPct val="120000"/>
-              </a:lnSpc>
-              <a:buNone/>
-            </a:pPr>
-            <a:r>
-              <a:rPr lang="en-US" sz="1200" dirty="0">
-                <a:solidFill>
-                  <a:srgbClr val="E8EEF7"/>
-                </a:solidFill>
-                <a:latin typeface="Courier New" pitchFamily="34" charset="0"/>
-                <a:ea typeface="Courier New" pitchFamily="34" charset="-122"/>
-                <a:cs typeface="Courier New" pitchFamily="34" charset="-120"/>
-              </a:rPr>
-              <a:t>php /home/USUARIO/.../cron/cron_notificacoes.php SUA_CHAVE</a:t>
-            </a:r>
-            <a:endParaRPr lang="en-US" sz="1200" dirty="0"/>
-          </a:p>
-          <a:p>
-            <a:pPr indent="0" marL="0">
-              <a:lnSpc>
-                <a:spcPct val="120000"/>
-              </a:lnSpc>
-              <a:buNone/>
-            </a:pPr>
-            <a:endParaRPr lang="en-US" sz="1200" dirty="0"/>
-          </a:p>
-          <a:p>
-            <a:pPr indent="0" marL="0">
-              <a:lnSpc>
-                <a:spcPct val="120000"/>
-              </a:lnSpc>
-              <a:buNone/>
-            </a:pPr>
-            <a:r>
-              <a:rPr lang="en-US" sz="1200" dirty="0">
-                <a:solidFill>
-                  <a:srgbClr val="E8EEF7"/>
-                </a:solidFill>
-                <a:latin typeface="Courier New" pitchFamily="34" charset="0"/>
-                <a:ea typeface="Courier New" pitchFamily="34" charset="-122"/>
-                <a:cs typeface="Courier New" pitchFamily="34" charset="-120"/>
-              </a:rPr>
-              <a:t># 1x ao dia (7h) — alertas de prazo + resumo semanal às segundas</a:t>
-            </a:r>
-            <a:endParaRPr lang="en-US" sz="1200" dirty="0"/>
-          </a:p>
-          <a:p>
-            <a:pPr indent="0" marL="0">
-              <a:lnSpc>
-                <a:spcPct val="120000"/>
-              </a:lnSpc>
-              <a:buNone/>
-            </a:pPr>
-            <a:r>
-              <a:rPr lang="en-US" sz="1200" dirty="0">
-                <a:solidFill>
-                  <a:srgbClr val="E8EEF7"/>
-                </a:solidFill>
-                <a:latin typeface="Courier New" pitchFamily="34" charset="0"/>
-                <a:ea typeface="Courier New" pitchFamily="34" charset="-122"/>
-                <a:cs typeface="Courier New" pitchFamily="34" charset="-120"/>
-              </a:rPr>
-              <a:t>php /home/USUARIO/.../cron/cron_prazos.php SUA_CHAVE</a:t>
-            </a:r>
-            <a:endParaRPr lang="en-US" sz="1200" dirty="0"/>
-          </a:p>
-        </p:txBody>
-      </p:sp>
-      <p:sp>
-        <p:nvSpPr>
-          <p:cNvPr id="10" name="Text 8"/>
+          <p:cNvPr id="19" name="Text 17"/>
           <p:cNvSpPr/>
           <p:nvPr/>
         </p:nvSpPr>
@@ -2610,7 +2837,7 @@
       </p:sp>
       <p:sp>
         <p:nvSpPr>
-          <p:cNvPr id="11" name="Text 9"/>
+          <p:cNvPr id="20" name="Text 18"/>
           <p:cNvSpPr/>
           <p:nvPr/>
         </p:nvSpPr>
@@ -3115,12 +3342,12 @@
         </p:nvSpPr>
         <p:spPr>
           <a:xfrm>
-            <a:off x="640080" y="4297680"/>
-            <a:ext cx="5669280" cy="1371600"/>
+            <a:off x="6583680" y="1783080"/>
+            <a:ext cx="5029200" cy="2103120"/>
           </a:xfrm>
           <a:prstGeom prst="roundRect">
             <a:avLst>
-              <a:gd name="adj" fmla="val 6000"/>
+              <a:gd name="adj" fmla="val 3913"/>
             </a:avLst>
           </a:prstGeom>
           <a:solidFill>
@@ -3142,8 +3369,8 @@
         </p:nvSpPr>
         <p:spPr>
           <a:xfrm>
-            <a:off x="841248" y="4443984"/>
-            <a:ext cx="5266944" cy="329184"/>
+            <a:off x="6784848" y="1929384"/>
+            <a:ext cx="4626864" cy="329184"/>
           </a:xfrm>
           <a:prstGeom prst="rect">
             <a:avLst/>
@@ -3181,8 +3408,8 @@
         </p:nvSpPr>
         <p:spPr>
           <a:xfrm>
-            <a:off x="841248" y="4773168"/>
-            <a:ext cx="5266944" cy="768096"/>
+            <a:off x="6784848" y="2258568"/>
+            <a:ext cx="4626864" cy="1499616"/>
           </a:xfrm>
           <a:prstGeom prst="rect">
             <a:avLst/>
@@ -3209,10 +3436,39 @@
                 <a:ea typeface="Calibri" pitchFamily="34" charset="-122"/>
                 <a:cs typeface="Calibri" pitchFamily="34" charset="-120"/>
               </a:rPr>
-              <a:t>Se era o único arquivo da categoria, ela volta a ser a etapa pendente do formador. Somente o ADMIN tem este botão.</a:t>
+              <a:t>Se era o único arquivo da categoria, ela volta a ser a etapa pendente do formador.</a:t>
             </a:r>
             <a:endParaRPr lang="en-US" sz="1300" dirty="0"/>
           </a:p>
+          <a:p>
+            <a:pPr indent="0" marL="0">
+              <a:lnSpc>
+                <a:spcPct val="112000"/>
+              </a:lnSpc>
+              <a:buNone/>
+            </a:pPr>
+            <a:endParaRPr lang="en-US" sz="1300" dirty="0"/>
+          </a:p>
+          <a:p>
+            <a:pPr indent="0" marL="0">
+              <a:lnSpc>
+                <a:spcPct val="112000"/>
+              </a:lnSpc>
+              <a:buNone/>
+            </a:pPr>
+            <a:r>
+              <a:rPr lang="en-US" sz="1300" dirty="0">
+                <a:solidFill>
+                  <a:srgbClr val="E8EEF7"/>
+                </a:solidFill>
+                <a:latin typeface="Calibri" pitchFamily="34" charset="0"/>
+                <a:ea typeface="Calibri" pitchFamily="34" charset="-122"/>
+                <a:cs typeface="Calibri" pitchFamily="34" charset="-120"/>
+              </a:rPr>
+              <a:t>Somente o ADMIN tem este botão.</a:t>
+            </a:r>
+            <a:endParaRPr lang="en-US" sz="1300" dirty="0"/>
+          </a:p>
         </p:txBody>
       </p:sp>
       <p:sp>
@@ -3223,12 +3479,12 @@
         </p:nvSpPr>
         <p:spPr>
           <a:xfrm>
-            <a:off x="6583680" y="1828800"/>
-            <a:ext cx="5120640" cy="1267140"/>
+            <a:off x="2252407" y="4206240"/>
+            <a:ext cx="7748147" cy="1828800"/>
           </a:xfrm>
           <a:prstGeom prst="roundRect">
             <a:avLst>
-              <a:gd name="adj" fmla="val 6495"/>
+              <a:gd name="adj" fmla="val 4500"/>
             </a:avLst>
           </a:prstGeom>
           <a:solidFill>
@@ -3258,8 +3514,8 @@
         </p:blipFill>
         <p:spPr>
           <a:xfrm>
-            <a:off x="6693408" y="1938528"/>
-            <a:ext cx="4901184" cy="1047684"/>
+            <a:off x="2362135" y="4315968"/>
+            <a:ext cx="7528691" cy="1609344"/>
           </a:xfrm>
           <a:prstGeom prst="rect">
             <a:avLst/>
@@ -3462,12 +3718,12 @@
         </p:nvSpPr>
         <p:spPr>
           <a:xfrm>
-            <a:off x="640080" y="1645920"/>
-            <a:ext cx="10881360" cy="914400"/>
+            <a:off x="640080" y="1691640"/>
+            <a:ext cx="10881360" cy="1024128"/>
           </a:xfrm>
           <a:prstGeom prst="roundRect">
             <a:avLst>
-              <a:gd name="adj" fmla="val 9000"/>
+              <a:gd name="adj" fmla="val 8036"/>
             </a:avLst>
           </a:prstGeom>
           <a:solidFill>
@@ -3489,7 +3745,7 @@
         </p:nvSpPr>
         <p:spPr>
           <a:xfrm>
-            <a:off x="841248" y="1792224"/>
+            <a:off x="841248" y="1837944"/>
             <a:ext cx="10479024" cy="329184"/>
           </a:xfrm>
           <a:prstGeom prst="rect">
@@ -3528,8 +3784,8 @@
         </p:nvSpPr>
         <p:spPr>
           <a:xfrm>
-            <a:off x="841248" y="2121408"/>
-            <a:ext cx="10479024" cy="310896"/>
+            <a:off x="841248" y="2167128"/>
+            <a:ext cx="10479024" cy="420624"/>
           </a:xfrm>
           <a:prstGeom prst="rect">
             <a:avLst/>
@@ -3570,12 +3826,12 @@
         </p:nvSpPr>
         <p:spPr>
           <a:xfrm>
-            <a:off x="640080" y="2706624"/>
-            <a:ext cx="10881360" cy="914400"/>
+            <a:off x="640080" y="2862072"/>
+            <a:ext cx="10881360" cy="1024128"/>
           </a:xfrm>
           <a:prstGeom prst="roundRect">
             <a:avLst>
-              <a:gd name="adj" fmla="val 9000"/>
+              <a:gd name="adj" fmla="val 8036"/>
             </a:avLst>
           </a:prstGeom>
           <a:solidFill>
@@ -3597,7 +3853,7 @@
         </p:nvSpPr>
         <p:spPr>
           <a:xfrm>
-            <a:off x="841248" y="2852928"/>
+            <a:off x="841248" y="3008376"/>
             <a:ext cx="10479024" cy="329184"/>
           </a:xfrm>
           <a:prstGeom prst="rect">
@@ -3636,8 +3892,8 @@
         </p:nvSpPr>
         <p:spPr>
           <a:xfrm>
-            <a:off x="841248" y="3182112"/>
-            <a:ext cx="10479024" cy="310896"/>
+            <a:off x="841248" y="3337560"/>
+            <a:ext cx="10479024" cy="420624"/>
           </a:xfrm>
           <a:prstGeom prst="rect">
             <a:avLst/>
@@ -3678,12 +3934,12 @@
         </p:nvSpPr>
         <p:spPr>
           <a:xfrm>
-            <a:off x="640080" y="3767328"/>
-            <a:ext cx="10881360" cy="914400"/>
+            <a:off x="640080" y="4032504"/>
+            <a:ext cx="10881360" cy="1024128"/>
           </a:xfrm>
           <a:prstGeom prst="roundRect">
             <a:avLst>
-              <a:gd name="adj" fmla="val 9000"/>
+              <a:gd name="adj" fmla="val 8036"/>
             </a:avLst>
           </a:prstGeom>
           <a:solidFill>
@@ -3705,7 +3961,7 @@
         </p:nvSpPr>
         <p:spPr>
           <a:xfrm>
-            <a:off x="841248" y="3913632"/>
+            <a:off x="841248" y="4178808"/>
             <a:ext cx="10479024" cy="329184"/>
           </a:xfrm>
           <a:prstGeom prst="rect">
@@ -3744,8 +4000,8 @@
         </p:nvSpPr>
         <p:spPr>
           <a:xfrm>
-            <a:off x="841248" y="4242816"/>
-            <a:ext cx="10479024" cy="310896"/>
+            <a:off x="841248" y="4507992"/>
+            <a:ext cx="10479024" cy="420624"/>
           </a:xfrm>
           <a:prstGeom prst="rect">
             <a:avLst/>
@@ -3772,7 +4028,7 @@
                 <a:ea typeface="Calibri" pitchFamily="34" charset="-122"/>
                 <a:cs typeface="Calibri" pitchFamily="34" charset="-120"/>
               </a:rPr>
-              <a:t>Colunas, status e transições mudam NA HORA para todos. Combine com a equipe antes.</a:t>
+              <a:t>Colunas, status e transições mudam NA HORA para todos.</a:t>
             </a:r>
             <a:endParaRPr lang="en-US" sz="1300" dirty="0"/>
           </a:p>
@@ -3786,12 +4042,12 @@
         </p:nvSpPr>
         <p:spPr>
           <a:xfrm>
-            <a:off x="640080" y="4828032"/>
-            <a:ext cx="10881360" cy="914400"/>
+            <a:off x="640080" y="5202936"/>
+            <a:ext cx="10881360" cy="1024128"/>
           </a:xfrm>
           <a:prstGeom prst="roundRect">
             <a:avLst>
-              <a:gd name="adj" fmla="val 9000"/>
+              <a:gd name="adj" fmla="val 8036"/>
             </a:avLst>
           </a:prstGeom>
           <a:solidFill>
@@ -3813,7 +4069,7 @@
         </p:nvSpPr>
         <p:spPr>
           <a:xfrm>
-            <a:off x="841248" y="4974336"/>
+            <a:off x="841248" y="5349240"/>
             <a:ext cx="10479024" cy="329184"/>
           </a:xfrm>
           <a:prstGeom prst="rect">
@@ -3852,8 +4108,8 @@
         </p:nvSpPr>
         <p:spPr>
           <a:xfrm>
-            <a:off x="841248" y="5303520"/>
-            <a:ext cx="10479024" cy="310896"/>
+            <a:off x="841248" y="5678424"/>
+            <a:ext cx="10479024" cy="420624"/>
           </a:xfrm>
           <a:prstGeom prst="rect">
             <a:avLst/>
@@ -4135,7 +4391,7 @@
         </p:nvSpPr>
         <p:spPr>
           <a:xfrm>
-            <a:off x="640080" y="1691640"/>
+            <a:off x="640080" y="1783080"/>
             <a:ext cx="384048" cy="384048"/>
           </a:xfrm>
           <a:prstGeom prst="ellipse">
@@ -4160,7 +4416,7 @@
         </p:nvSpPr>
         <p:spPr>
           <a:xfrm>
-            <a:off x="640080" y="1691640"/>
+            <a:off x="640080" y="1783080"/>
             <a:ext cx="384048" cy="384048"/>
           </a:xfrm>
           <a:prstGeom prst="rect">
@@ -4199,7 +4455,7 @@
         </p:nvSpPr>
         <p:spPr>
           <a:xfrm>
-            <a:off x="1207008" y="1655064"/>
+            <a:off x="1207008" y="1746504"/>
             <a:ext cx="4828032" cy="731520"/>
           </a:xfrm>
           <a:prstGeom prst="rect">
@@ -4224,7 +4480,7 @@
                 <a:ea typeface="Calibri" pitchFamily="34" charset="-122"/>
                 <a:cs typeface="Calibri" pitchFamily="34" charset="-120"/>
               </a:rPr>
-              <a:t>O menu Admin e a visão geral</a:t>
+              <a:t>O menu Admin</a:t>
             </a:r>
             <a:endParaRPr lang="en-US" sz="1550" dirty="0"/>
           </a:p>
@@ -4238,7 +4494,7 @@
         </p:nvSpPr>
         <p:spPr>
           <a:xfrm>
-            <a:off x="640080" y="2532888"/>
+            <a:off x="640080" y="2862072"/>
             <a:ext cx="384048" cy="384048"/>
           </a:xfrm>
           <a:prstGeom prst="ellipse">
@@ -4263,7 +4519,7 @@
         </p:nvSpPr>
         <p:spPr>
           <a:xfrm>
-            <a:off x="640080" y="2532888"/>
+            <a:off x="640080" y="2862072"/>
             <a:ext cx="384048" cy="384048"/>
           </a:xfrm>
           <a:prstGeom prst="rect">
@@ -4302,7 +4558,7 @@
         </p:nvSpPr>
         <p:spPr>
           <a:xfrm>
-            <a:off x="1207008" y="2496312"/>
+            <a:off x="1207008" y="2825496"/>
             <a:ext cx="4828032" cy="731520"/>
           </a:xfrm>
           <a:prstGeom prst="rect">
@@ -4327,7 +4583,7 @@
                 <a:ea typeface="Calibri" pitchFamily="34" charset="-122"/>
                 <a:cs typeface="Calibri" pitchFamily="34" charset="-120"/>
               </a:rPr>
-              <a:t>Colunas, status e transições</a:t>
+              <a:t>Colunas e status</a:t>
             </a:r>
             <a:endParaRPr lang="en-US" sz="1550" dirty="0"/>
           </a:p>
@@ -4341,7 +4597,7 @@
         </p:nvSpPr>
         <p:spPr>
           <a:xfrm>
-            <a:off x="640080" y="3374136"/>
+            <a:off x="640080" y="3941064"/>
             <a:ext cx="384048" cy="384048"/>
           </a:xfrm>
           <a:prstGeom prst="ellipse">
@@ -4366,7 +4622,7 @@
         </p:nvSpPr>
         <p:spPr>
           <a:xfrm>
-            <a:off x="640080" y="3374136"/>
+            <a:off x="640080" y="3941064"/>
             <a:ext cx="384048" cy="384048"/>
           </a:xfrm>
           <a:prstGeom prst="rect">
@@ -4405,7 +4661,7 @@
         </p:nvSpPr>
         <p:spPr>
           <a:xfrm>
-            <a:off x="1207008" y="3337560"/>
+            <a:off x="1207008" y="3904488"/>
             <a:ext cx="4828032" cy="731520"/>
           </a:xfrm>
           <a:prstGeom prst="rect">
@@ -4430,7 +4686,7 @@
                 <a:ea typeface="Calibri" pitchFamily="34" charset="-122"/>
                 <a:cs typeface="Calibri" pitchFamily="34" charset="-120"/>
               </a:rPr>
-              <a:t>Usuários</a:t>
+              <a:t>Transições por perfil</a:t>
             </a:r>
             <a:endParaRPr lang="en-US" sz="1550" dirty="0"/>
           </a:p>
@@ -4444,7 +4700,7 @@
         </p:nvSpPr>
         <p:spPr>
           <a:xfrm>
-            <a:off x="640080" y="4215384"/>
+            <a:off x="640080" y="5020056"/>
             <a:ext cx="384048" cy="384048"/>
           </a:xfrm>
           <a:prstGeom prst="ellipse">
@@ -4469,7 +4725,7 @@
         </p:nvSpPr>
         <p:spPr>
           <a:xfrm>
-            <a:off x="640080" y="4215384"/>
+            <a:off x="640080" y="5020056"/>
             <a:ext cx="384048" cy="384048"/>
           </a:xfrm>
           <a:prstGeom prst="rect">
@@ -4508,7 +4764,7 @@
         </p:nvSpPr>
         <p:spPr>
           <a:xfrm>
-            <a:off x="1207008" y="4178808"/>
+            <a:off x="1207008" y="4983480"/>
             <a:ext cx="4828032" cy="731520"/>
           </a:xfrm>
           <a:prstGeom prst="rect">
@@ -4533,7 +4789,7 @@
                 <a:ea typeface="Calibri" pitchFamily="34" charset="-122"/>
                 <a:cs typeface="Calibri" pitchFamily="34" charset="-120"/>
               </a:rPr>
-              <a:t>Perfis de acesso</a:t>
+              <a:t>Usuários</a:t>
             </a:r>
             <a:endParaRPr lang="en-US" sz="1550" dirty="0"/>
           </a:p>
@@ -4547,7 +4803,7 @@
         </p:nvSpPr>
         <p:spPr>
           <a:xfrm>
-            <a:off x="6492240" y="1691640"/>
+            <a:off x="6492240" y="1783080"/>
             <a:ext cx="384048" cy="384048"/>
           </a:xfrm>
           <a:prstGeom prst="ellipse">
@@ -4572,7 +4828,7 @@
         </p:nvSpPr>
         <p:spPr>
           <a:xfrm>
-            <a:off x="6492240" y="1691640"/>
+            <a:off x="6492240" y="1783080"/>
             <a:ext cx="384048" cy="384048"/>
           </a:xfrm>
           <a:prstGeom prst="rect">
@@ -4611,7 +4867,7 @@
         </p:nvSpPr>
         <p:spPr>
           <a:xfrm>
-            <a:off x="7059168" y="1655064"/>
+            <a:off x="7059168" y="1746504"/>
             <a:ext cx="4828032" cy="731520"/>
           </a:xfrm>
           <a:prstGeom prst="rect">
@@ -4636,7 +4892,7 @@
                 <a:ea typeface="Calibri" pitchFamily="34" charset="-122"/>
                 <a:cs typeface="Calibri" pitchFamily="34" charset="-120"/>
               </a:rPr>
-              <a:t>Escolas em lote</a:t>
+              <a:t>Perfis de acesso</a:t>
             </a:r>
             <a:endParaRPr lang="en-US" sz="1550" dirty="0"/>
           </a:p>
@@ -4650,7 +4906,7 @@
         </p:nvSpPr>
         <p:spPr>
           <a:xfrm>
-            <a:off x="6492240" y="2532888"/>
+            <a:off x="6492240" y="2862072"/>
             <a:ext cx="384048" cy="384048"/>
           </a:xfrm>
           <a:prstGeom prst="ellipse">
@@ -4675,7 +4931,7 @@
         </p:nvSpPr>
         <p:spPr>
           <a:xfrm>
-            <a:off x="6492240" y="2532888"/>
+            <a:off x="6492240" y="2862072"/>
             <a:ext cx="384048" cy="384048"/>
           </a:xfrm>
           <a:prstGeom prst="rect">
@@ -4714,7 +4970,7 @@
         </p:nvSpPr>
         <p:spPr>
           <a:xfrm>
-            <a:off x="7059168" y="2496312"/>
+            <a:off x="7059168" y="2825496"/>
             <a:ext cx="4828032" cy="731520"/>
           </a:xfrm>
           <a:prstGeom prst="rect">
@@ -4739,7 +4995,7 @@
                 <a:ea typeface="Calibri" pitchFamily="34" charset="-122"/>
                 <a:cs typeface="Calibri" pitchFamily="34" charset="-120"/>
               </a:rPr>
-              <a:t>Auditoria</a:t>
+              <a:t>Escolas em lote</a:t>
             </a:r>
             <a:endParaRPr lang="en-US" sz="1550" dirty="0"/>
           </a:p>
@@ -4753,7 +5009,7 @@
         </p:nvSpPr>
         <p:spPr>
           <a:xfrm>
-            <a:off x="6492240" y="3374136"/>
+            <a:off x="6492240" y="3941064"/>
             <a:ext cx="384048" cy="384048"/>
           </a:xfrm>
           <a:prstGeom prst="ellipse">
@@ -4778,7 +5034,7 @@
         </p:nvSpPr>
         <p:spPr>
           <a:xfrm>
-            <a:off x="6492240" y="3374136"/>
+            <a:off x="6492240" y="3941064"/>
             <a:ext cx="384048" cy="384048"/>
           </a:xfrm>
           <a:prstGeom prst="rect">
@@ -4817,7 +5073,7 @@
         </p:nvSpPr>
         <p:spPr>
           <a:xfrm>
-            <a:off x="7059168" y="3337560"/>
+            <a:off x="7059168" y="3904488"/>
             <a:ext cx="4828032" cy="731520"/>
           </a:xfrm>
           <a:prstGeom prst="rect">
@@ -4842,7 +5098,7 @@
                 <a:ea typeface="Calibri" pitchFamily="34" charset="-122"/>
                 <a:cs typeface="Calibri" pitchFamily="34" charset="-120"/>
               </a:rPr>
-              <a:t>Notificações e crons</a:t>
+              <a:t>Auditoria e notificações</a:t>
             </a:r>
             <a:endParaRPr lang="en-US" sz="1550" dirty="0"/>
           </a:p>
@@ -4856,7 +5112,7 @@
         </p:nvSpPr>
         <p:spPr>
           <a:xfrm>
-            <a:off x="6492240" y="4215384"/>
+            <a:off x="6492240" y="5020056"/>
             <a:ext cx="384048" cy="384048"/>
           </a:xfrm>
           <a:prstGeom prst="ellipse">
@@ -4881,7 +5137,7 @@
         </p:nvSpPr>
         <p:spPr>
           <a:xfrm>
-            <a:off x="6492240" y="4215384"/>
+            <a:off x="6492240" y="5020056"/>
             <a:ext cx="384048" cy="384048"/>
           </a:xfrm>
           <a:prstGeom prst="rect">
@@ -4920,7 +5176,7 @@
         </p:nvSpPr>
         <p:spPr>
           <a:xfrm>
-            <a:off x="7059168" y="4178808"/>
+            <a:off x="7059168" y="4983480"/>
             <a:ext cx="4828032" cy="731520"/>
           </a:xfrm>
           <a:prstGeom prst="rect">
@@ -4945,7 +5201,7 @@
                 <a:ea typeface="Calibri" pitchFamily="34" charset="-122"/>
                 <a:cs typeface="Calibri" pitchFamily="34" charset="-120"/>
               </a:rPr>
-              <a:t>Excluir arquivos e boas práticas</a:t>
+              <a:t>Vídeos e manutenção</a:t>
             </a:r>
             <a:endParaRPr lang="en-US" sz="1550" dirty="0"/>
           </a:p>
@@ -5147,12 +5403,12 @@
         </p:nvSpPr>
         <p:spPr>
           <a:xfrm>
-            <a:off x="1046871" y="1554480"/>
-            <a:ext cx="2295378" cy="4480560"/>
+            <a:off x="839677" y="1554480"/>
+            <a:ext cx="2344006" cy="4480560"/>
           </a:xfrm>
           <a:prstGeom prst="roundRect">
             <a:avLst>
-              <a:gd name="adj" fmla="val 3585"/>
+              <a:gd name="adj" fmla="val 3511"/>
             </a:avLst>
           </a:prstGeom>
           <a:solidFill>
@@ -5182,8 +5438,8 @@
         </p:blipFill>
         <p:spPr>
           <a:xfrm>
-            <a:off x="1156599" y="1664208"/>
-            <a:ext cx="2075922" cy="4261104"/>
+            <a:off x="949405" y="1664208"/>
+            <a:ext cx="2124550" cy="4261104"/>
           </a:xfrm>
           <a:prstGeom prst="rect">
             <a:avLst/>
@@ -5198,12 +5454,12 @@
         </p:nvSpPr>
         <p:spPr>
           <a:xfrm>
-            <a:off x="4023360" y="1554480"/>
-            <a:ext cx="7589520" cy="3136230"/>
+            <a:off x="3749040" y="1554480"/>
+            <a:ext cx="7863840" cy="3244795"/>
           </a:xfrm>
           <a:prstGeom prst="roundRect">
             <a:avLst>
-              <a:gd name="adj" fmla="val 2624"/>
+              <a:gd name="adj" fmla="val 2536"/>
             </a:avLst>
           </a:prstGeom>
           <a:solidFill>
@@ -5233,8 +5489,8 @@
         </p:blipFill>
         <p:spPr>
           <a:xfrm>
-            <a:off x="4133088" y="1664208"/>
-            <a:ext cx="7370064" cy="2916774"/>
+            <a:off x="3858768" y="1664208"/>
+            <a:ext cx="7644384" cy="3025339"/>
           </a:xfrm>
           <a:prstGeom prst="rect">
             <a:avLst/>
@@ -5249,23 +5505,20 @@
         </p:nvSpPr>
         <p:spPr>
           <a:xfrm>
-            <a:off x="4023360" y="5394960"/>
-            <a:ext cx="7589520" cy="731520"/>
-          </a:xfrm>
-          <a:prstGeom prst="rect">
-            <a:avLst/>
-          </a:prstGeom>
-          <a:noFill/>
-          <a:ln/>
-        </p:spPr>
-        <p:txBody>
-          <a:bodyPr wrap="square" lIns="0" tIns="0" rIns="0" bIns="0" rtlCol="0" anchor="ctr"/>
-          <a:lstStyle/>
-          <a:p>
-            <a:pPr indent="0" marL="0">
-              <a:lnSpc>
-                <a:spcPct val="115000"/>
-              </a:lnSpc>
+            <a:off x="3749040" y="5715000"/>
+            <a:ext cx="7863840" cy="457200"/>
+          </a:xfrm>
+          <a:prstGeom prst="rect">
+            <a:avLst/>
+          </a:prstGeom>
+          <a:noFill/>
+          <a:ln/>
+        </p:spPr>
+        <p:txBody>
+          <a:bodyPr wrap="square" lIns="0" tIns="0" rIns="0" bIns="0" rtlCol="0" anchor="ctr"/>
+          <a:lstStyle/>
+          <a:p>
+            <a:pPr indent="0" marL="0">
               <a:buNone/>
             </a:pPr>
             <a:r>
@@ -5280,9 +5533,6 @@
               <a:t>Visão geral: </a:t>
             </a:r>
             <a:pPr indent="0" marL="0">
-              <a:lnSpc>
-                <a:spcPct val="115000"/>
-              </a:lnSpc>
               <a:buNone/>
             </a:pPr>
             <a:r>
@@ -5294,7 +5544,7 @@
                 <a:ea typeface="Calibri" pitchFamily="34" charset="-122"/>
                 <a:cs typeface="Calibri" pitchFamily="34" charset="-120"/>
               </a:rPr>
-              <a:t>cartões com contadores e o botão Gerenciar de cada área. Tudo o que este tutorial cobre está a um clique daqui.</a:t>
+              <a:t>cartões com contadores e o botão Gerenciar de cada área.</a:t>
             </a:r>
             <a:endParaRPr lang="en-US" sz="1300" dirty="0"/>
           </a:p>
@@ -5497,11 +5747,11 @@
         <p:spPr>
           <a:xfrm>
             <a:off x="640080" y="1645920"/>
-            <a:ext cx="5394960" cy="4206240"/>
+            <a:ext cx="5394960" cy="2834640"/>
           </a:xfrm>
           <a:prstGeom prst="roundRect">
             <a:avLst>
-              <a:gd name="adj" fmla="val 1957"/>
+              <a:gd name="adj" fmla="val 2903"/>
             </a:avLst>
           </a:prstGeom>
           <a:solidFill>
@@ -5563,7 +5813,7 @@
         <p:spPr>
           <a:xfrm>
             <a:off x="841248" y="2121408"/>
-            <a:ext cx="4992624" cy="3602736"/>
+            <a:ext cx="4992624" cy="2231136"/>
           </a:xfrm>
           <a:prstGeom prst="rect">
             <a:avLst/>
@@ -5582,7 +5832,7 @@
               <a:buNone/>
             </a:pPr>
             <a:r>
-              <a:rPr lang="en-US" sz="1300" dirty="0">
+              <a:rPr lang="en-US" sz="1350" dirty="0">
                 <a:solidFill>
                   <a:srgbClr val="E8EEF7"/>
                 </a:solidFill>
@@ -5592,7 +5842,7 @@
               </a:rPr>
               <a:t>• Adicionar: nome + cor do cabeçalho</a:t>
             </a:r>
-            <a:endParaRPr lang="en-US" sz="1300" dirty="0"/>
+            <a:endParaRPr lang="en-US" sz="1350" dirty="0"/>
           </a:p>
           <a:p>
             <a:pPr indent="0" marL="0">
@@ -5602,7 +5852,7 @@
               <a:buNone/>
             </a:pPr>
             <a:r>
-              <a:rPr lang="en-US" sz="1300" dirty="0">
+              <a:rPr lang="en-US" sz="1350" dirty="0">
                 <a:solidFill>
                   <a:srgbClr val="E8EEF7"/>
                 </a:solidFill>
@@ -5612,7 +5862,7 @@
               </a:rPr>
               <a:t>• Renomear e recolorir na própria linha</a:t>
             </a:r>
-            <a:endParaRPr lang="en-US" sz="1300" dirty="0"/>
+            <a:endParaRPr lang="en-US" sz="1350" dirty="0"/>
           </a:p>
           <a:p>
             <a:pPr indent="0" marL="0">
@@ -5622,7 +5872,7 @@
               <a:buNone/>
             </a:pPr>
             <a:r>
-              <a:rPr lang="en-US" sz="1300" dirty="0">
+              <a:rPr lang="en-US" sz="1350" dirty="0">
                 <a:solidFill>
                   <a:srgbClr val="E8EEF7"/>
                 </a:solidFill>
@@ -5632,7 +5882,7 @@
               </a:rPr>
               <a:t>• Reordenar com as setas ↑ ↓</a:t>
             </a:r>
-            <a:endParaRPr lang="en-US" sz="1300" dirty="0"/>
+            <a:endParaRPr lang="en-US" sz="1350" dirty="0"/>
           </a:p>
           <a:p>
             <a:pPr indent="0" marL="0">
@@ -5642,7 +5892,7 @@
               <a:buNone/>
             </a:pPr>
             <a:r>
-              <a:rPr lang="en-US" sz="1300" dirty="0">
+              <a:rPr lang="en-US" sz="1350" dirty="0">
                 <a:solidFill>
                   <a:srgbClr val="E8EEF7"/>
                 </a:solidFill>
@@ -5650,9 +5900,9 @@
                 <a:ea typeface="Calibri" pitchFamily="34" charset="-122"/>
                 <a:cs typeface="Calibri" pitchFamily="34" charset="-120"/>
               </a:rPr>
-              <a:t>• Limite WIP: máximo recomendado de cursos na coluna (contador fica vermelho ao passar)</a:t>
-            </a:r>
-            <a:endParaRPr lang="en-US" sz="1300" dirty="0"/>
+              <a:t>• Limite WIP: máximo recomendado de cursos</a:t>
+            </a:r>
+            <a:endParaRPr lang="en-US" sz="1350" dirty="0"/>
           </a:p>
           <a:p>
             <a:pPr indent="0" marL="0">
@@ -5662,7 +5912,7 @@
               <a:buNone/>
             </a:pPr>
             <a:r>
-              <a:rPr lang="en-US" sz="1300" dirty="0">
+              <a:rPr lang="en-US" sz="1350" dirty="0">
                 <a:solidFill>
                   <a:srgbClr val="E8EEF7"/>
                 </a:solidFill>
@@ -5672,36 +5922,7 @@
               </a:rPr>
               <a:t>• Desativar esconde sem apagar</a:t>
             </a:r>
-            <a:endParaRPr lang="en-US" sz="1300" dirty="0"/>
-          </a:p>
-          <a:p>
-            <a:pPr indent="0" marL="0">
-              <a:lnSpc>
-                <a:spcPct val="112000"/>
-              </a:lnSpc>
-              <a:buNone/>
-            </a:pPr>
-            <a:endParaRPr lang="en-US" sz="1300" dirty="0"/>
-          </a:p>
-          <a:p>
-            <a:pPr indent="0" marL="0">
-              <a:lnSpc>
-                <a:spcPct val="112000"/>
-              </a:lnSpc>
-              <a:buNone/>
-            </a:pPr>
-            <a:r>
-              <a:rPr lang="en-US" sz="1300" dirty="0">
-                <a:solidFill>
-                  <a:srgbClr val="E8EEF7"/>
-                </a:solidFill>
-                <a:latin typeface="Calibri" pitchFamily="34" charset="0"/>
-                <a:ea typeface="Calibri" pitchFamily="34" charset="-122"/>
-                <a:cs typeface="Calibri" pitchFamily="34" charset="-120"/>
-              </a:rPr>
-              <a:t>Mudanças valem NA HORA para todos.</a:t>
-            </a:r>
-            <a:endParaRPr lang="en-US" sz="1300" dirty="0"/>
+            <a:endParaRPr lang="en-US" sz="1350" dirty="0"/>
           </a:p>
         </p:txBody>
       </p:sp>
@@ -5714,11 +5935,11 @@
         <p:spPr>
           <a:xfrm>
             <a:off x="6217920" y="1645920"/>
-            <a:ext cx="5394960" cy="4206240"/>
+            <a:ext cx="5394960" cy="2834640"/>
           </a:xfrm>
           <a:prstGeom prst="roundRect">
             <a:avLst>
-              <a:gd name="adj" fmla="val 1957"/>
+              <a:gd name="adj" fmla="val 2903"/>
             </a:avLst>
           </a:prstGeom>
           <a:solidFill>
@@ -5780,7 +6001,7 @@
         <p:spPr>
           <a:xfrm>
             <a:off x="6419088" y="2121408"/>
-            <a:ext cx="4992624" cy="3602736"/>
+            <a:ext cx="4992624" cy="2231136"/>
           </a:xfrm>
           <a:prstGeom prst="rect">
             <a:avLst/>
@@ -5799,7 +6020,7 @@
               <a:buNone/>
             </a:pPr>
             <a:r>
-              <a:rPr lang="en-US" sz="1300" dirty="0">
+              <a:rPr lang="en-US" sz="1350" dirty="0">
                 <a:solidFill>
                   <a:srgbClr val="E8EEF7"/>
                 </a:solidFill>
@@ -5809,7 +6030,7 @@
               </a:rPr>
               <a:t>• Criar: nome, coluna, cor da etiqueta</a:t>
             </a:r>
-            <a:endParaRPr lang="en-US" sz="1300" dirty="0"/>
+            <a:endParaRPr lang="en-US" sz="1350" dirty="0"/>
           </a:p>
           <a:p>
             <a:pPr indent="0" marL="0">
@@ -5819,7 +6040,7 @@
               <a:buNone/>
             </a:pPr>
             <a:r>
-              <a:rPr lang="en-US" sz="1300" dirty="0">
+              <a:rPr lang="en-US" sz="1350" dirty="0">
                 <a:solidFill>
                   <a:srgbClr val="E8EEF7"/>
                 </a:solidFill>
@@ -5829,7 +6050,7 @@
               </a:rPr>
               <a:t>• Mover entre colunas e reordenar</a:t>
             </a:r>
-            <a:endParaRPr lang="en-US" sz="1300" dirty="0"/>
+            <a:endParaRPr lang="en-US" sz="1350" dirty="0"/>
           </a:p>
           <a:p>
             <a:pPr indent="0" marL="0">
@@ -5839,7 +6060,7 @@
               <a:buNone/>
             </a:pPr>
             <a:r>
-              <a:rPr lang="en-US" sz="1300" dirty="0">
+              <a:rPr lang="en-US" sz="1350" dirty="0">
                 <a:solidFill>
                   <a:srgbClr val="E8EEF7"/>
                 </a:solidFill>
@@ -5847,9 +6068,9 @@
                 <a:ea typeface="Calibri" pitchFamily="34" charset="-122"/>
                 <a:cs typeface="Calibri" pitchFamily="34" charset="-120"/>
               </a:rPr>
-              <a:t>• Status inicial: o que todo curso novo recebe (só um)</a:t>
-            </a:r>
-            <a:endParaRPr lang="en-US" sz="1300" dirty="0"/>
+              <a:t>• Status inicial: o que todo curso novo recebe</a:t>
+            </a:r>
+            <a:endParaRPr lang="en-US" sz="1350" dirty="0"/>
           </a:p>
           <a:p>
             <a:pPr indent="0" marL="0">
@@ -5859,7 +6080,7 @@
               <a:buNone/>
             </a:pPr>
             <a:r>
-              <a:rPr lang="en-US" sz="1300" dirty="0">
+              <a:rPr lang="en-US" sz="1350" dirty="0">
                 <a:solidFill>
                   <a:srgbClr val="E8EEF7"/>
                 </a:solidFill>
@@ -5869,7 +6090,7 @@
               </a:rPr>
               <a:t>• Status finais: encerram o fluxo</a:t>
             </a:r>
-            <a:endParaRPr lang="en-US" sz="1300" dirty="0"/>
+            <a:endParaRPr lang="en-US" sz="1350" dirty="0"/>
           </a:p>
           <a:p>
             <a:pPr indent="0" marL="0">
@@ -5879,7 +6100,7 @@
               <a:buNone/>
             </a:pPr>
             <a:r>
-              <a:rPr lang="en-US" sz="1300" dirty="0">
+              <a:rPr lang="en-US" sz="1350" dirty="0">
                 <a:solidFill>
                   <a:srgbClr val="E8EEF7"/>
                 </a:solidFill>
@@ -5887,10 +6108,98 @@
                 <a:ea typeface="Calibri" pitchFamily="34" charset="-122"/>
                 <a:cs typeface="Calibri" pitchFamily="34" charset="-120"/>
               </a:rPr>
-              <a:t>• Renomear atualiza cursos e histórico automaticamente</a:t>
-            </a:r>
-            <a:endParaRPr lang="en-US" sz="1300" dirty="0"/>
-          </a:p>
+              <a:t>• Renomear atualiza cursos e histórico</a:t>
+            </a:r>
+            <a:endParaRPr lang="en-US" sz="1350" dirty="0"/>
+          </a:p>
+        </p:txBody>
+      </p:sp>
+      <p:sp>
+        <p:nvSpPr>
+          <p:cNvPr id="10" name="Shape 8"/>
+          <p:cNvSpPr/>
+          <p:nvPr/>
+        </p:nvSpPr>
+        <p:spPr>
+          <a:xfrm>
+            <a:off x="640080" y="4754880"/>
+            <a:ext cx="10972800" cy="1234440"/>
+          </a:xfrm>
+          <a:prstGeom prst="roundRect">
+            <a:avLst>
+              <a:gd name="adj" fmla="val 6667"/>
+            </a:avLst>
+          </a:prstGeom>
+          <a:solidFill>
+            <a:srgbClr val="10233F"/>
+          </a:solidFill>
+          <a:ln w="12700">
+            <a:solidFill>
+              <a:srgbClr val="1D3A5F"/>
+            </a:solidFill>
+            <a:prstDash val="solid"/>
+          </a:ln>
+        </p:spPr>
+      </p:sp>
+      <p:sp>
+        <p:nvSpPr>
+          <p:cNvPr id="11" name="Text 9"/>
+          <p:cNvSpPr/>
+          <p:nvPr/>
+        </p:nvSpPr>
+        <p:spPr>
+          <a:xfrm>
+            <a:off x="841248" y="4901184"/>
+            <a:ext cx="10570464" cy="329184"/>
+          </a:xfrm>
+          <a:prstGeom prst="rect">
+            <a:avLst/>
+          </a:prstGeom>
+          <a:noFill/>
+          <a:ln/>
+        </p:spPr>
+        <p:txBody>
+          <a:bodyPr wrap="square" lIns="0" tIns="0" rIns="0" bIns="0" rtlCol="0" anchor="ctr"/>
+          <a:lstStyle/>
+          <a:p>
+            <a:pPr indent="0" marL="0">
+              <a:buNone/>
+            </a:pPr>
+            <a:r>
+              <a:rPr lang="en-US" sz="1400" b="1" dirty="0">
+                <a:solidFill>
+                  <a:srgbClr val="22D3EE"/>
+                </a:solidFill>
+                <a:latin typeface="Calibri" pitchFamily="34" charset="0"/>
+                <a:ea typeface="Calibri" pitchFamily="34" charset="-122"/>
+                <a:cs typeface="Calibri" pitchFamily="34" charset="-120"/>
+              </a:rPr>
+              <a:t>As mudanças valem na hora</a:t>
+            </a:r>
+            <a:endParaRPr lang="en-US" sz="1400" dirty="0"/>
+          </a:p>
+        </p:txBody>
+      </p:sp>
+      <p:sp>
+        <p:nvSpPr>
+          <p:cNvPr id="12" name="Text 10"/>
+          <p:cNvSpPr/>
+          <p:nvPr/>
+        </p:nvSpPr>
+        <p:spPr>
+          <a:xfrm>
+            <a:off x="841248" y="5230368"/>
+            <a:ext cx="10570464" cy="630936"/>
+          </a:xfrm>
+          <a:prstGeom prst="rect">
+            <a:avLst/>
+          </a:prstGeom>
+          <a:noFill/>
+          <a:ln/>
+        </p:spPr>
+        <p:txBody>
+          <a:bodyPr wrap="square" lIns="0" tIns="0" rIns="0" bIns="0" rtlCol="0" anchor="t"/>
+          <a:lstStyle/>
           <a:p>
             <a:pPr indent="0" marL="0">
               <a:lnSpc>
@@ -5907,7 +6216,7 @@
                 <a:ea typeface="Calibri" pitchFamily="34" charset="-122"/>
                 <a:cs typeface="Calibri" pitchFamily="34" charset="-120"/>
               </a:rPr>
-              <a:t>• Excluir: só sem cursos na fase — senão desative</a:t>
+              <a:t>Qualquer alteração em colunas ou status aparece imediatamente no Kanban de todos os perfis. Status em uso por cursos não podem ser excluídos — desative-os ou renomeie-os.</a:t>
             </a:r>
             <a:endParaRPr lang="en-US" sz="1300" dirty="0"/>
           </a:p>
@@ -5915,7 +6224,7 @@
       </p:sp>
       <p:sp>
         <p:nvSpPr>
-          <p:cNvPr id="10" name="Text 8"/>
+          <p:cNvPr id="13" name="Text 11"/>
           <p:cNvSpPr/>
           <p:nvPr/>
         </p:nvSpPr>
@@ -5954,7 +6263,7 @@
       </p:sp>
       <p:sp>
         <p:nvSpPr>
-          <p:cNvPr id="11" name="Text 9"/>
+          <p:cNvPr id="14" name="Text 12"/>
           <p:cNvSpPr/>
           <p:nvPr/>
         </p:nvSpPr>
@@ -6110,11 +6419,11 @@
         <p:spPr>
           <a:xfrm>
             <a:off x="640080" y="1645920"/>
-            <a:ext cx="10972800" cy="2011680"/>
+            <a:ext cx="10972800" cy="1371600"/>
           </a:xfrm>
           <a:prstGeom prst="roundRect">
             <a:avLst>
-              <a:gd name="adj" fmla="val 4091"/>
+              <a:gd name="adj" fmla="val 6000"/>
             </a:avLst>
           </a:prstGeom>
           <a:solidFill>
@@ -6176,7 +6485,7 @@
         <p:spPr>
           <a:xfrm>
             <a:off x="841248" y="2121408"/>
-            <a:ext cx="10570464" cy="1408176"/>
+            <a:ext cx="10570464" cy="768096"/>
           </a:xfrm>
           <a:prstGeom prst="rect">
             <a:avLst/>
@@ -6203,7 +6512,7 @@
                 <a:ea typeface="Calibri" pitchFamily="34" charset="-122"/>
                 <a:cs typeface="Calibri" pitchFamily="34" charset="-120"/>
               </a:rPr>
-              <a:t>Cada linha da tabela diz: o perfil X pode mover um curso do status A para o status B. Para adicionar, escolha perfil, origem e destino nas três listas e clique em adicionar. O ADMIN não precisa de transição — pode todas.</a:t>
+              <a:t>Cada linha diz: o perfil X pode mover um curso do status A para o status B. O ADMIN não precisa de transição — pode todas.</a:t>
             </a:r>
             <a:endParaRPr lang="en-US" sz="1350" dirty="0"/>
           </a:p>
@@ -6211,18 +6520,314 @@
       </p:sp>
       <p:sp>
         <p:nvSpPr>
-          <p:cNvPr id="7" name="Shape 5"/>
-          <p:cNvSpPr/>
-          <p:nvPr/>
-        </p:nvSpPr>
-        <p:spPr>
-          <a:xfrm>
-            <a:off x="640080" y="3931920"/>
-            <a:ext cx="5394960" cy="2011680"/>
+          <p:cNvPr id="7" name="Text 5"/>
+          <p:cNvSpPr/>
+          <p:nvPr/>
+        </p:nvSpPr>
+        <p:spPr>
+          <a:xfrm>
+            <a:off x="640080" y="3200400"/>
+            <a:ext cx="7315200" cy="320040"/>
+          </a:xfrm>
+          <a:prstGeom prst="rect">
+            <a:avLst/>
+          </a:prstGeom>
+          <a:noFill/>
+          <a:ln/>
+        </p:spPr>
+        <p:txBody>
+          <a:bodyPr wrap="square" lIns="0" tIns="0" rIns="0" bIns="0" rtlCol="0" anchor="ctr"/>
+          <a:lstStyle/>
+          <a:p>
+            <a:pPr indent="0" marL="0">
+              <a:buNone/>
+            </a:pPr>
+            <a:r>
+              <a:rPr lang="en-US" sz="1400" b="1" dirty="0">
+                <a:solidFill>
+                  <a:srgbClr val="E8EEF7"/>
+                </a:solidFill>
+                <a:latin typeface="Calibri" pitchFamily="34" charset="0"/>
+                <a:ea typeface="Calibri" pitchFamily="34" charset="-122"/>
+                <a:cs typeface="Calibri" pitchFamily="34" charset="-120"/>
+              </a:rPr>
+              <a:t>Fases com campo obrigatório</a:t>
+            </a:r>
+            <a:endParaRPr lang="en-US" sz="1400" dirty="0"/>
+          </a:p>
+        </p:txBody>
+      </p:sp>
+      <p:sp>
+        <p:nvSpPr>
+          <p:cNvPr id="8" name="Text 6"/>
+          <p:cNvSpPr/>
+          <p:nvPr/>
+        </p:nvSpPr>
+        <p:spPr>
+          <a:xfrm>
+            <a:off x="640080" y="3611880"/>
+            <a:ext cx="4937760" cy="548640"/>
+          </a:xfrm>
+          <a:prstGeom prst="rect">
+            <a:avLst/>
+          </a:prstGeom>
+          <a:noFill/>
+          <a:ln/>
+        </p:spPr>
+        <p:txBody>
+          <a:bodyPr wrap="square" lIns="0" tIns="0" rIns="0" bIns="0" rtlCol="0" anchor="ctr"/>
+          <a:lstStyle/>
+          <a:p>
+            <a:pPr indent="0" marL="0">
+              <a:buNone/>
+            </a:pPr>
+            <a:r>
+              <a:rPr lang="en-US" sz="1250" b="1" dirty="0">
+                <a:solidFill>
+                  <a:srgbClr val="22D3EE"/>
+                </a:solidFill>
+                <a:latin typeface="Calibri" pitchFamily="34" charset="0"/>
+                <a:ea typeface="Calibri" pitchFamily="34" charset="-122"/>
+                <a:cs typeface="Calibri" pitchFamily="34" charset="-120"/>
+              </a:rPr>
+              <a:t>Curso Proposto → Projeto Aprovado</a:t>
+            </a:r>
+            <a:endParaRPr lang="en-US" sz="1250" dirty="0"/>
+          </a:p>
+        </p:txBody>
+      </p:sp>
+      <p:sp>
+        <p:nvSpPr>
+          <p:cNvPr id="9" name="Text 7"/>
+          <p:cNvSpPr/>
+          <p:nvPr/>
+        </p:nvSpPr>
+        <p:spPr>
+          <a:xfrm>
+            <a:off x="5669280" y="3611880"/>
+            <a:ext cx="1097280" cy="548640"/>
+          </a:xfrm>
+          <a:prstGeom prst="rect">
+            <a:avLst/>
+          </a:prstGeom>
+          <a:noFill/>
+          <a:ln/>
+        </p:spPr>
+        <p:txBody>
+          <a:bodyPr wrap="square" lIns="0" tIns="0" rIns="0" bIns="0" rtlCol="0" anchor="ctr"/>
+          <a:lstStyle/>
+          <a:p>
+            <a:pPr indent="0" marL="0">
+              <a:buNone/>
+            </a:pPr>
+            <a:r>
+              <a:rPr lang="en-US" sz="1250" dirty="0">
+                <a:solidFill>
+                  <a:srgbClr val="8BAAC8"/>
+                </a:solidFill>
+                <a:latin typeface="Calibri" pitchFamily="34" charset="0"/>
+                <a:ea typeface="Calibri" pitchFamily="34" charset="-122"/>
+                <a:cs typeface="Calibri" pitchFamily="34" charset="-120"/>
+              </a:rPr>
+              <a:t>TI</a:t>
+            </a:r>
+            <a:endParaRPr lang="en-US" sz="1250" dirty="0"/>
+          </a:p>
+        </p:txBody>
+      </p:sp>
+      <p:sp>
+        <p:nvSpPr>
+          <p:cNvPr id="10" name="Text 8"/>
+          <p:cNvSpPr/>
+          <p:nvPr/>
+        </p:nvSpPr>
+        <p:spPr>
+          <a:xfrm>
+            <a:off x="6858000" y="3611880"/>
+            <a:ext cx="4754880" cy="548640"/>
+          </a:xfrm>
+          <a:prstGeom prst="rect">
+            <a:avLst/>
+          </a:prstGeom>
+          <a:noFill/>
+          <a:ln/>
+        </p:spPr>
+        <p:txBody>
+          <a:bodyPr wrap="square" lIns="0" tIns="0" rIns="0" bIns="0" rtlCol="0" anchor="ctr"/>
+          <a:lstStyle/>
+          <a:p>
+            <a:pPr indent="0" marL="0">
+              <a:buNone/>
+            </a:pPr>
+            <a:r>
+              <a:rPr lang="en-US" sz="1250" dirty="0">
+                <a:solidFill>
+                  <a:srgbClr val="E8EEF7"/>
+                </a:solidFill>
+                <a:latin typeface="Calibri" pitchFamily="34" charset="0"/>
+                <a:ea typeface="Calibri" pitchFamily="34" charset="-122"/>
+                <a:cs typeface="Calibri" pitchFamily="34" charset="-120"/>
+              </a:rPr>
+              <a:t>Carga horária (10/20/30/40 h)</a:t>
+            </a:r>
+            <a:endParaRPr lang="en-US" sz="1250" dirty="0"/>
+          </a:p>
+        </p:txBody>
+      </p:sp>
+      <p:sp>
+        <p:nvSpPr>
+          <p:cNvPr id="11" name="Shape 9"/>
+          <p:cNvSpPr/>
+          <p:nvPr/>
+        </p:nvSpPr>
+        <p:spPr>
+          <a:xfrm>
+            <a:off x="640080" y="4187952"/>
+            <a:ext cx="10972800" cy="0"/>
+          </a:xfrm>
+          <a:prstGeom prst="line">
+            <a:avLst/>
+          </a:prstGeom>
+          <a:noFill/>
+          <a:ln w="9525">
+            <a:solidFill>
+              <a:srgbClr val="1D3A5F"/>
+            </a:solidFill>
+            <a:prstDash val="solid"/>
+          </a:ln>
+        </p:spPr>
+      </p:sp>
+      <p:sp>
+        <p:nvSpPr>
+          <p:cNvPr id="12" name="Text 10"/>
+          <p:cNvSpPr/>
+          <p:nvPr/>
+        </p:nvSpPr>
+        <p:spPr>
+          <a:xfrm>
+            <a:off x="640080" y="4270248"/>
+            <a:ext cx="4937760" cy="548640"/>
+          </a:xfrm>
+          <a:prstGeom prst="rect">
+            <a:avLst/>
+          </a:prstGeom>
+          <a:noFill/>
+          <a:ln/>
+        </p:spPr>
+        <p:txBody>
+          <a:bodyPr wrap="square" lIns="0" tIns="0" rIns="0" bIns="0" rtlCol="0" anchor="ctr"/>
+          <a:lstStyle/>
+          <a:p>
+            <a:pPr indent="0" marL="0">
+              <a:buNone/>
+            </a:pPr>
+            <a:r>
+              <a:rPr lang="en-US" sz="1250" b="1" dirty="0">
+                <a:solidFill>
+                  <a:srgbClr val="22D3EE"/>
+                </a:solidFill>
+                <a:latin typeface="Calibri" pitchFamily="34" charset="0"/>
+                <a:ea typeface="Calibri" pitchFamily="34" charset="-122"/>
+                <a:cs typeface="Calibri" pitchFamily="34" charset="-120"/>
+              </a:rPr>
+              <a:t>Validado → Pronto para Publicação</a:t>
+            </a:r>
+            <a:endParaRPr lang="en-US" sz="1250" dirty="0"/>
+          </a:p>
+        </p:txBody>
+      </p:sp>
+      <p:sp>
+        <p:nvSpPr>
+          <p:cNvPr id="13" name="Text 11"/>
+          <p:cNvSpPr/>
+          <p:nvPr/>
+        </p:nvSpPr>
+        <p:spPr>
+          <a:xfrm>
+            <a:off x="5669280" y="4270248"/>
+            <a:ext cx="1097280" cy="548640"/>
+          </a:xfrm>
+          <a:prstGeom prst="rect">
+            <a:avLst/>
+          </a:prstGeom>
+          <a:noFill/>
+          <a:ln/>
+        </p:spPr>
+        <p:txBody>
+          <a:bodyPr wrap="square" lIns="0" tIns="0" rIns="0" bIns="0" rtlCol="0" anchor="ctr"/>
+          <a:lstStyle/>
+          <a:p>
+            <a:pPr indent="0" marL="0">
+              <a:buNone/>
+            </a:pPr>
+            <a:r>
+              <a:rPr lang="en-US" sz="1250" dirty="0">
+                <a:solidFill>
+                  <a:srgbClr val="8BAAC8"/>
+                </a:solidFill>
+                <a:latin typeface="Calibri" pitchFamily="34" charset="0"/>
+                <a:ea typeface="Calibri" pitchFamily="34" charset="-122"/>
+                <a:cs typeface="Calibri" pitchFamily="34" charset="-120"/>
+              </a:rPr>
+              <a:t>TI</a:t>
+            </a:r>
+            <a:endParaRPr lang="en-US" sz="1250" dirty="0"/>
+          </a:p>
+        </p:txBody>
+      </p:sp>
+      <p:sp>
+        <p:nvSpPr>
+          <p:cNvPr id="14" name="Text 12"/>
+          <p:cNvSpPr/>
+          <p:nvPr/>
+        </p:nvSpPr>
+        <p:spPr>
+          <a:xfrm>
+            <a:off x="6858000" y="4270248"/>
+            <a:ext cx="4754880" cy="548640"/>
+          </a:xfrm>
+          <a:prstGeom prst="rect">
+            <a:avLst/>
+          </a:prstGeom>
+          <a:noFill/>
+          <a:ln/>
+        </p:spPr>
+        <p:txBody>
+          <a:bodyPr wrap="square" lIns="0" tIns="0" rIns="0" bIns="0" rtlCol="0" anchor="ctr"/>
+          <a:lstStyle/>
+          <a:p>
+            <a:pPr indent="0" marL="0">
+              <a:buNone/>
+            </a:pPr>
+            <a:r>
+              <a:rPr lang="en-US" sz="1250" dirty="0">
+                <a:solidFill>
+                  <a:srgbClr val="E8EEF7"/>
+                </a:solidFill>
+                <a:latin typeface="Calibri" pitchFamily="34" charset="0"/>
+                <a:ea typeface="Calibri" pitchFamily="34" charset="-122"/>
+                <a:cs typeface="Calibri" pitchFamily="34" charset="-120"/>
+              </a:rPr>
+              <a:t>Data de entrada na plataforma</a:t>
+            </a:r>
+            <a:endParaRPr lang="en-US" sz="1250" dirty="0"/>
+          </a:p>
+        </p:txBody>
+      </p:sp>
+      <p:sp>
+        <p:nvSpPr>
+          <p:cNvPr id="15" name="Shape 13"/>
+          <p:cNvSpPr/>
+          <p:nvPr/>
+        </p:nvSpPr>
+        <p:spPr>
+          <a:xfrm>
+            <a:off x="640080" y="5029200"/>
+            <a:ext cx="10972800" cy="1097280"/>
           </a:xfrm>
           <a:prstGeom prst="roundRect">
             <a:avLst>
-              <a:gd name="adj" fmla="val 4091"/>
+              <a:gd name="adj" fmla="val 7500"/>
             </a:avLst>
           </a:prstGeom>
           <a:solidFill>
@@ -6238,14 +6843,14 @@
       </p:sp>
       <p:sp>
         <p:nvSpPr>
-          <p:cNvPr id="8" name="Text 6"/>
-          <p:cNvSpPr/>
-          <p:nvPr/>
-        </p:nvSpPr>
-        <p:spPr>
-          <a:xfrm>
-            <a:off x="841248" y="4078224"/>
-            <a:ext cx="4992624" cy="329184"/>
+          <p:cNvPr id="16" name="Text 14"/>
+          <p:cNvSpPr/>
+          <p:nvPr/>
+        </p:nvSpPr>
+        <p:spPr>
+          <a:xfrm>
+            <a:off x="841248" y="5175504"/>
+            <a:ext cx="10570464" cy="329184"/>
           </a:xfrm>
           <a:prstGeom prst="rect">
             <a:avLst/>
@@ -6263,13 +6868,13 @@
             <a:r>
               <a:rPr lang="en-US" sz="1400" b="1" dirty="0">
                 <a:solidFill>
-                  <a:srgbClr val="FBBF24"/>
-                </a:solidFill>
-                <a:latin typeface="Calibri" pitchFamily="34" charset="0"/>
-                <a:ea typeface="Calibri" pitchFamily="34" charset="-122"/>
-                <a:cs typeface="Calibri" pitchFamily="34" charset="-120"/>
-              </a:rPr>
-              <a:t>Sintoma clássico</a:t>
+                  <a:srgbClr val="34D399"/>
+                </a:solidFill>
+                <a:latin typeface="Calibri" pitchFamily="34" charset="0"/>
+                <a:ea typeface="Calibri" pitchFamily="34" charset="-122"/>
+                <a:cs typeface="Calibri" pitchFamily="34" charset="-120"/>
+              </a:rPr>
+              <a:t>Socorro rápido</a:t>
             </a:r>
             <a:endParaRPr lang="en-US" sz="1400" dirty="0"/>
           </a:p>
@@ -6277,14 +6882,14 @@
       </p:sp>
       <p:sp>
         <p:nvSpPr>
-          <p:cNvPr id="9" name="Text 7"/>
-          <p:cNvSpPr/>
-          <p:nvPr/>
-        </p:nvSpPr>
-        <p:spPr>
-          <a:xfrm>
-            <a:off x="841248" y="4407408"/>
-            <a:ext cx="4992624" cy="1408176"/>
+          <p:cNvPr id="17" name="Text 15"/>
+          <p:cNvSpPr/>
+          <p:nvPr/>
+        </p:nvSpPr>
+        <p:spPr>
+          <a:xfrm>
+            <a:off x="841248" y="5504688"/>
+            <a:ext cx="10570464" cy="493776"/>
           </a:xfrm>
           <a:prstGeom prst="rect">
             <a:avLst/>
@@ -6311,7 +6916,7 @@
                 <a:ea typeface="Calibri" pitchFamily="34" charset="-122"/>
                 <a:cs typeface="Calibri" pitchFamily="34" charset="-120"/>
               </a:rPr>
-              <a:t>"O formador não consegue mover o curso" → confira se a transição existe para o perfil PROFESSOR nesta tela.</a:t>
+              <a:t>Transições bagunçadas por testes? Rode database/reset_transicoes.sql no phpMyAdmin — restaura o fluxo oficial completo (17 regras).</a:t>
             </a:r>
             <a:endParaRPr lang="en-US" sz="1300" dirty="0"/>
           </a:p>
@@ -6319,115 +6924,7 @@
       </p:sp>
       <p:sp>
         <p:nvSpPr>
-          <p:cNvPr id="10" name="Shape 8"/>
-          <p:cNvSpPr/>
-          <p:nvPr/>
-        </p:nvSpPr>
-        <p:spPr>
-          <a:xfrm>
-            <a:off x="6217920" y="3931920"/>
-            <a:ext cx="5394960" cy="2011680"/>
-          </a:xfrm>
-          <a:prstGeom prst="roundRect">
-            <a:avLst>
-              <a:gd name="adj" fmla="val 4091"/>
-            </a:avLst>
-          </a:prstGeom>
-          <a:solidFill>
-            <a:srgbClr val="10233F"/>
-          </a:solidFill>
-          <a:ln w="12700">
-            <a:solidFill>
-              <a:srgbClr val="1D3A5F"/>
-            </a:solidFill>
-            <a:prstDash val="solid"/>
-          </a:ln>
-        </p:spPr>
-      </p:sp>
-      <p:sp>
-        <p:nvSpPr>
-          <p:cNvPr id="11" name="Text 9"/>
-          <p:cNvSpPr/>
-          <p:nvPr/>
-        </p:nvSpPr>
-        <p:spPr>
-          <a:xfrm>
-            <a:off x="6419088" y="4078224"/>
-            <a:ext cx="4992624" cy="329184"/>
-          </a:xfrm>
-          <a:prstGeom prst="rect">
-            <a:avLst/>
-          </a:prstGeom>
-          <a:noFill/>
-          <a:ln/>
-        </p:spPr>
-        <p:txBody>
-          <a:bodyPr wrap="square" lIns="0" tIns="0" rIns="0" bIns="0" rtlCol="0" anchor="ctr"/>
-          <a:lstStyle/>
-          <a:p>
-            <a:pPr indent="0" marL="0">
-              <a:buNone/>
-            </a:pPr>
-            <a:r>
-              <a:rPr lang="en-US" sz="1400" b="1" dirty="0">
-                <a:solidFill>
-                  <a:srgbClr val="34D399"/>
-                </a:solidFill>
-                <a:latin typeface="Calibri" pitchFamily="34" charset="0"/>
-                <a:ea typeface="Calibri" pitchFamily="34" charset="-122"/>
-                <a:cs typeface="Calibri" pitchFamily="34" charset="-120"/>
-              </a:rPr>
-              <a:t>Socorro rápido</a:t>
-            </a:r>
-            <a:endParaRPr lang="en-US" sz="1400" dirty="0"/>
-          </a:p>
-        </p:txBody>
-      </p:sp>
-      <p:sp>
-        <p:nvSpPr>
-          <p:cNvPr id="12" name="Text 10"/>
-          <p:cNvSpPr/>
-          <p:nvPr/>
-        </p:nvSpPr>
-        <p:spPr>
-          <a:xfrm>
-            <a:off x="6419088" y="4407408"/>
-            <a:ext cx="4992624" cy="1408176"/>
-          </a:xfrm>
-          <a:prstGeom prst="rect">
-            <a:avLst/>
-          </a:prstGeom>
-          <a:noFill/>
-          <a:ln/>
-        </p:spPr>
-        <p:txBody>
-          <a:bodyPr wrap="square" lIns="0" tIns="0" rIns="0" bIns="0" rtlCol="0" anchor="t"/>
-          <a:lstStyle/>
-          <a:p>
-            <a:pPr indent="0" marL="0">
-              <a:lnSpc>
-                <a:spcPct val="112000"/>
-              </a:lnSpc>
-              <a:buNone/>
-            </a:pPr>
-            <a:r>
-              <a:rPr lang="en-US" sz="1300" dirty="0">
-                <a:solidFill>
-                  <a:srgbClr val="E8EEF7"/>
-                </a:solidFill>
-                <a:latin typeface="Calibri" pitchFamily="34" charset="0"/>
-                <a:ea typeface="Calibri" pitchFamily="34" charset="-122"/>
-                <a:cs typeface="Calibri" pitchFamily="34" charset="-120"/>
-              </a:rPr>
-              <a:t>Transições bagunçadas por testes? Rode database/reset_transicoes.sql no phpMyAdmin — restaura o fluxo oficial completo (16 regras).</a:t>
-            </a:r>
-            <a:endParaRPr lang="en-US" sz="1300" dirty="0"/>
-          </a:p>
-        </p:txBody>
-      </p:sp>
-      <p:sp>
-        <p:nvSpPr>
-          <p:cNvPr id="13" name="Text 11"/>
+          <p:cNvPr id="18" name="Text 16"/>
           <p:cNvSpPr/>
           <p:nvPr/>
         </p:nvSpPr>
@@ -6466,7 +6963,7 @@
       </p:sp>
       <p:sp>
         <p:nvSpPr>
-          <p:cNvPr id="14" name="Text 12"/>
+          <p:cNvPr id="19" name="Text 17"/>
           <p:cNvSpPr/>
           <p:nvPr/>
         </p:nvSpPr>
@@ -7055,7 +7552,7 @@
                 <a:ea typeface="Calibri" pitchFamily="34" charset="-122"/>
                 <a:cs typeface="Calibri" pitchFamily="34" charset="-120"/>
               </a:rPr>
-              <a:t>→ oriente a trocar no 1º acesso (Meu Perfil);</a:t>
+              <a:t>→ oriente a trocar no 1º acesso;</a:t>
             </a:r>
             <a:endParaRPr lang="en-US" sz="1400" dirty="0"/>
           </a:p>
@@ -7303,12 +7800,12 @@
         </p:nvSpPr>
         <p:spPr>
           <a:xfrm>
-            <a:off x="6766560" y="1645920"/>
-            <a:ext cx="4846320" cy="800885"/>
+            <a:off x="6583680" y="1645920"/>
+            <a:ext cx="5029200" cy="823866"/>
           </a:xfrm>
           <a:prstGeom prst="roundRect">
             <a:avLst>
-              <a:gd name="adj" fmla="val 10276"/>
+              <a:gd name="adj" fmla="val 9989"/>
             </a:avLst>
           </a:prstGeom>
           <a:solidFill>
@@ -7338,8 +7835,8 @@
         </p:blipFill>
         <p:spPr>
           <a:xfrm>
-            <a:off x="6876288" y="1755648"/>
-            <a:ext cx="4626864" cy="581429"/>
+            <a:off x="6693408" y="1755648"/>
+            <a:ext cx="4809744" cy="604410"/>
           </a:xfrm>
           <a:prstGeom prst="rect">
             <a:avLst/>
@@ -7528,7 +8025,7 @@
                 <a:ea typeface="Calibri" pitchFamily="34" charset="-122"/>
                 <a:cs typeface="Calibri" pitchFamily="34" charset="-120"/>
               </a:rPr>
-              <a:t>5. Perfis de acesso — crie os seus</a:t>
+              <a:t>5. Perfis de acesso</a:t>
             </a:r>
             <a:endParaRPr lang="en-US" sz="3000" dirty="0"/>
           </a:p>
@@ -7744,7 +8241,7 @@
                 <a:ea typeface="Calibri" pitchFamily="34" charset="-122"/>
                 <a:cs typeface="Calibri" pitchFamily="34" charset="-120"/>
               </a:rPr>
-              <a:t>Kanban completo (senão, só os próprios)</a:t>
+              <a:t>Kanban completo</a:t>
             </a:r>
             <a:endParaRPr lang="en-US" sz="1200" dirty="0"/>
           </a:p>
@@ -8068,7 +8565,7 @@
                 <a:ea typeface="Calibri" pitchFamily="34" charset="-122"/>
                 <a:cs typeface="Calibri" pitchFamily="34" charset="-120"/>
               </a:rPr>
-              <a:t>Aprovar, recusar com relatório, apontamentos</a:t>
+              <a:t>Aprovar, recusar, apontamentos</a:t>
             </a:r>
             <a:endParaRPr lang="en-US" sz="1200" dirty="0"/>
           </a:p>
@@ -8176,7 +8673,7 @@
                 <a:ea typeface="Calibri" pitchFamily="34" charset="-122"/>
                 <a:cs typeface="Calibri" pitchFamily="34" charset="-120"/>
               </a:rPr>
-              <a:t>Publicar na Biblioteca de Modelos</a:t>
+              <a:t>Publicar na Biblioteca</a:t>
             </a:r>
             <a:endParaRPr lang="en-US" sz="1200" dirty="0"/>
           </a:p>
@@ -8392,7 +8889,7 @@
                 <a:ea typeface="Calibri" pitchFamily="34" charset="-122"/>
                 <a:cs typeface="Calibri" pitchFamily="34" charset="-120"/>
               </a:rPr>
-              <a:t>Avisos de inserção/publicação</a:t>
+              <a:t>MB: inserção, publicação e vídeos</a:t>
             </a:r>
             <a:endParaRPr lang="en-US" sz="1200" dirty="0"/>
           </a:p>
@@ -8431,7 +8928,7 @@
                 <a:ea typeface="Calibri" pitchFamily="34" charset="-122"/>
                 <a:cs typeface="Calibri" pitchFamily="34" charset="-120"/>
               </a:rPr>
-              <a:t>Ex.: um perfil COORDENADOR só com "Vê todos os cursos" = acesso somente-leitura. O perfil ADMIN é protegido.</a:t>
+              <a:t>A permissão "E-mail de inserção" também identifica quem publica vídeos (a MB Estúdios). O perfil ADMIN é protegido.</a:t>
             </a:r>
             <a:endParaRPr lang="en-US" sz="1200" dirty="0"/>
           </a:p>
@@ -8745,7 +9242,7 @@
                 <a:ea typeface="Calibri" pitchFamily="34" charset="-122"/>
                 <a:cs typeface="Calibri" pitchFamily="34" charset="-120"/>
               </a:rPr>
-              <a:t> (pode colar direto de uma planilha);</a:t>
+              <a:t>;</a:t>
             </a:r>
             <a:endParaRPr lang="en-US" sz="1400" dirty="0"/>
           </a:p>
@@ -8969,7 +9466,7 @@
                 <a:ea typeface="Calibri" pitchFamily="34" charset="-122"/>
                 <a:cs typeface="Calibri" pitchFamily="34" charset="-120"/>
               </a:rPr>
-              <a:t>O sistema informa quantas entraram e quantas eram repetidas (ignoradas, sem erro).</a:t>
+              <a:t>O sistema informa quantas entraram e quantas eram repetidas.</a:t>
             </a:r>
             <a:endParaRPr lang="en-US" sz="1400" dirty="0"/>
           </a:p>
@@ -9035,7 +9532,7 @@
                 <a:ea typeface="Calibri" pitchFamily="34" charset="-122"/>
                 <a:cs typeface="Calibri" pitchFamily="34" charset="-120"/>
               </a:rPr>
-              <a:t>Onde as escolas aparecem</a:t>
+              <a:t>Onde aparecem</a:t>
             </a:r>
             <a:endParaRPr lang="en-US" sz="1400" dirty="0"/>
           </a:p>
@@ -9077,7 +9574,7 @@
                 <a:ea typeface="Calibri" pitchFamily="34" charset="-122"/>
                 <a:cs typeface="Calibri" pitchFamily="34" charset="-120"/>
               </a:rPr>
-              <a:t>No autocompletar da proposta de curso e dos filtros. Renomear atualiza os cursos vinculados; Desativar tira do autocompletar; Excluir só sem cursos vinculados.</a:t>
+              <a:t>No autocompletar da proposta de curso e dos filtros. Renomear atualiza os cursos vinculados; Desativar tira do autocompletar.</a:t>
             </a:r>
             <a:endParaRPr lang="en-US" sz="1250" dirty="0"/>
           </a:p>
@@ -9316,7 +9813,7 @@
                 <a:ea typeface="Calibri" pitchFamily="34" charset="-122"/>
                 <a:cs typeface="Calibri" pitchFamily="34" charset="-120"/>
               </a:rPr>
-              <a:t>7. Auditoria — quem fez o quê</a:t>
+              <a:t>7. Auditoria e notificações</a:t>
             </a:r>
             <a:endParaRPr lang="en-US" sz="3000" dirty="0"/>
           </a:p>
@@ -9330,7 +9827,7 @@
         </p:nvSpPr>
         <p:spPr>
           <a:xfrm>
-            <a:off x="640080" y="1508760"/>
+            <a:off x="640080" y="1463040"/>
             <a:ext cx="10972800" cy="1228177"/>
           </a:xfrm>
           <a:prstGeom prst="roundRect">
@@ -9365,7 +9862,7 @@
         </p:blipFill>
         <p:spPr>
           <a:xfrm>
-            <a:off x="749808" y="1618488"/>
+            <a:off x="749808" y="1572768"/>
             <a:ext cx="10753344" cy="1008721"/>
           </a:xfrm>
           <a:prstGeom prst="rect">
@@ -9381,12 +9878,12 @@
         </p:nvSpPr>
         <p:spPr>
           <a:xfrm>
-            <a:off x="640080" y="3886200"/>
-            <a:ext cx="5394960" cy="2103120"/>
+            <a:off x="640080" y="3931920"/>
+            <a:ext cx="5394960" cy="2057400"/>
           </a:xfrm>
           <a:prstGeom prst="roundRect">
             <a:avLst>
-              <a:gd name="adj" fmla="val 3913"/>
+              <a:gd name="adj" fmla="val 4000"/>
             </a:avLst>
           </a:prstGeom>
           <a:solidFill>
@@ -9408,7 +9905,7 @@
         </p:nvSpPr>
         <p:spPr>
           <a:xfrm>
-            <a:off x="841248" y="4032504"/>
+            <a:off x="841248" y="4078224"/>
             <a:ext cx="4992624" cy="329184"/>
           </a:xfrm>
           <a:prstGeom prst="rect">
@@ -9433,7 +9930,7 @@
                 <a:ea typeface="Calibri" pitchFamily="34" charset="-122"/>
                 <a:cs typeface="Calibri" pitchFamily="34" charset="-120"/>
               </a:rPr>
-              <a:t>O que fica registrado</a:t>
+              <a:t>Auditoria</a:t>
             </a:r>
             <a:endParaRPr lang="en-US" sz="1400" dirty="0"/>
           </a:p>
@@ -9447,8 +9944,8 @@
         </p:nvSpPr>
         <p:spPr>
           <a:xfrm>
-            <a:off x="841248" y="4361688"/>
-            <a:ext cx="4992624" cy="1499616"/>
+            <a:off x="841248" y="4407408"/>
+            <a:ext cx="4992624" cy="1453896"/>
           </a:xfrm>
           <a:prstGeom prst="rect">
             <a:avLst/>
@@ -9467,7 +9964,7 @@
               <a:buNone/>
             </a:pPr>
             <a:r>
-              <a:rPr lang="en-US" sz="1300" dirty="0">
+              <a:rPr lang="en-US" sz="1250" dirty="0">
                 <a:solidFill>
                   <a:srgbClr val="E8EEF7"/>
                 </a:solidFill>
@@ -9475,9 +9972,9 @@
                 <a:ea typeface="Calibri" pitchFamily="34" charset="-122"/>
                 <a:cs typeface="Calibri" pitchFamily="34" charset="-120"/>
               </a:rPr>
-              <a:t>Login, criação/edição de cursos, mudanças de status, uploads, downloads, exclusões, "sem material" — com data/hora, usuário, valores antes/depois e IP.</a:t>
-            </a:r>
-            <a:endParaRPr lang="en-US" sz="1300" dirty="0"/>
+              <a:t>Login, criação/edição de cursos, mudanças de status, uploads, downloads, exclusões, apontamentos de vídeo — com data/hora, usuário, valores antes/depois e IP. Exportável em CSV.</a:t>
+            </a:r>
+            <a:endParaRPr lang="en-US" sz="1250" dirty="0"/>
           </a:p>
         </p:txBody>
       </p:sp>
@@ -9489,12 +9986,12 @@
         </p:nvSpPr>
         <p:spPr>
           <a:xfrm>
-            <a:off x="6217920" y="3886200"/>
-            <a:ext cx="5394960" cy="2103120"/>
+            <a:off x="6217920" y="3931920"/>
+            <a:ext cx="5394960" cy="2057400"/>
           </a:xfrm>
           <a:prstGeom prst="roundRect">
             <a:avLst>
-              <a:gd name="adj" fmla="val 3913"/>
+              <a:gd name="adj" fmla="val 4000"/>
             </a:avLst>
           </a:prstGeom>
           <a:solidFill>
@@ -9516,7 +10013,7 @@
         </p:nvSpPr>
         <p:spPr>
           <a:xfrm>
-            <a:off x="6419088" y="4032504"/>
+            <a:off x="6419088" y="4078224"/>
             <a:ext cx="4992624" cy="329184"/>
           </a:xfrm>
           <a:prstGeom prst="rect">
@@ -9541,7 +10038,7 @@
                 <a:ea typeface="Calibri" pitchFamily="34" charset="-122"/>
                 <a:cs typeface="Calibri" pitchFamily="34" charset="-120"/>
               </a:rPr>
-              <a:t>Como pesquisar</a:t>
+              <a:t>Notificações</a:t>
             </a:r>
             <a:endParaRPr lang="en-US" sz="1400" dirty="0"/>
           </a:p>
@@ -9555,8 +10052,8 @@
         </p:nvSpPr>
         <p:spPr>
           <a:xfrm>
-            <a:off x="6419088" y="4361688"/>
-            <a:ext cx="4992624" cy="1499616"/>
+            <a:off x="6419088" y="4407408"/>
+            <a:ext cx="4992624" cy="1453896"/>
           </a:xfrm>
           <a:prstGeom prst="rect">
             <a:avLst/>
@@ -9575,7 +10072,7 @@
               <a:buNone/>
             </a:pPr>
             <a:r>
-              <a:rPr lang="en-US" sz="1300" dirty="0">
+              <a:rPr lang="en-US" sz="1250" dirty="0">
                 <a:solidFill>
                   <a:srgbClr val="E8EEF7"/>
                 </a:solidFill>
@@ -9583,38 +10080,9 @@
                 <a:ea typeface="Calibri" pitchFamily="34" charset="-122"/>
                 <a:cs typeface="Calibri" pitchFamily="34" charset="-120"/>
               </a:rPr>
-              <a:t>Combine Usuário (com lista), Ação, Entidade e período De/Até → Filtrar.</a:t>
-            </a:r>
-            <a:endParaRPr lang="en-US" sz="1300" dirty="0"/>
-          </a:p>
-          <a:p>
-            <a:pPr indent="0" marL="0">
-              <a:lnSpc>
-                <a:spcPct val="112000"/>
-              </a:lnSpc>
-              <a:buNone/>
-            </a:pPr>
-            <a:endParaRPr lang="en-US" sz="1300" dirty="0"/>
-          </a:p>
-          <a:p>
-            <a:pPr indent="0" marL="0">
-              <a:lnSpc>
-                <a:spcPct val="112000"/>
-              </a:lnSpc>
-              <a:buNone/>
-            </a:pPr>
-            <a:r>
-              <a:rPr lang="en-US" sz="1300" dirty="0">
-                <a:solidFill>
-                  <a:srgbClr val="E8EEF7"/>
-                </a:solidFill>
-                <a:latin typeface="Calibri" pitchFamily="34" charset="0"/>
-                <a:ea typeface="Calibri" pitchFamily="34" charset="-122"/>
-                <a:cs typeface="Calibri" pitchFamily="34" charset="-120"/>
-              </a:rPr>
-              <a:t>Exportar CSV baixa o resultado para o Excel.</a:t>
-            </a:r>
-            <a:endParaRPr lang="en-US" sz="1300" dirty="0"/>
+              <a:t>Fila de e-mails com status ENVIADO, PENDENTE ou ERRO. Os e-mails saem na hora; o cron de 5 min reenvia os que falharem. Dá para reprocessar manualmente.</a:t>
+            </a:r>
+            <a:endParaRPr lang="en-US" sz="1250" dirty="0"/>
           </a:p>
         </p:txBody>
       </p:sp>

--- a/docs/tutoriais/Tutorial-Admin.pptx
+++ b/docs/tutoriais/Tutorial-Admin.pptx
@@ -3718,12 +3718,12 @@
         </p:nvSpPr>
         <p:spPr>
           <a:xfrm>
-            <a:off x="640080" y="1691640"/>
-            <a:ext cx="10881360" cy="1024128"/>
+            <a:off x="640080" y="1645920"/>
+            <a:ext cx="10881360" cy="914400"/>
           </a:xfrm>
           <a:prstGeom prst="roundRect">
             <a:avLst>
-              <a:gd name="adj" fmla="val 8036"/>
+              <a:gd name="adj" fmla="val 9000"/>
             </a:avLst>
           </a:prstGeom>
           <a:solidFill>
@@ -3745,7 +3745,7 @@
         </p:nvSpPr>
         <p:spPr>
           <a:xfrm>
-            <a:off x="841248" y="1837944"/>
+            <a:off x="841248" y="1792224"/>
             <a:ext cx="10479024" cy="329184"/>
           </a:xfrm>
           <a:prstGeom prst="rect">
@@ -3784,8 +3784,8 @@
         </p:nvSpPr>
         <p:spPr>
           <a:xfrm>
-            <a:off x="841248" y="2167128"/>
-            <a:ext cx="10479024" cy="420624"/>
+            <a:off x="841248" y="2121408"/>
+            <a:ext cx="10479024" cy="310896"/>
           </a:xfrm>
           <a:prstGeom prst="rect">
             <a:avLst/>
@@ -3804,7 +3804,7 @@
               <a:buNone/>
             </a:pPr>
             <a:r>
-              <a:rPr lang="en-US" sz="1300" dirty="0">
+              <a:rPr lang="en-US" sz="1250" dirty="0">
                 <a:solidFill>
                   <a:srgbClr val="E8EEF7"/>
                 </a:solidFill>
@@ -3814,7 +3814,7 @@
               </a:rPr>
               <a:t>Antes de qualquer migração (database/upgrade_v*.sql): cPanel → phpMyAdmin → Exportar.</a:t>
             </a:r>
-            <a:endParaRPr lang="en-US" sz="1300" dirty="0"/>
+            <a:endParaRPr lang="en-US" sz="1250" dirty="0"/>
           </a:p>
         </p:txBody>
       </p:sp>
@@ -3826,12 +3826,12 @@
         </p:nvSpPr>
         <p:spPr>
           <a:xfrm>
-            <a:off x="640080" y="2862072"/>
-            <a:ext cx="10881360" cy="1024128"/>
+            <a:off x="640080" y="2679192"/>
+            <a:ext cx="10881360" cy="914400"/>
           </a:xfrm>
           <a:prstGeom prst="roundRect">
             <a:avLst>
-              <a:gd name="adj" fmla="val 8036"/>
+              <a:gd name="adj" fmla="val 9000"/>
             </a:avLst>
           </a:prstGeom>
           <a:solidFill>
@@ -3853,7 +3853,7 @@
         </p:nvSpPr>
         <p:spPr>
           <a:xfrm>
-            <a:off x="841248" y="3008376"/>
+            <a:off x="841248" y="2825496"/>
             <a:ext cx="10479024" cy="329184"/>
           </a:xfrm>
           <a:prstGeom prst="rect">
@@ -3892,8 +3892,8 @@
         </p:nvSpPr>
         <p:spPr>
           <a:xfrm>
-            <a:off x="841248" y="3337560"/>
-            <a:ext cx="10479024" cy="420624"/>
+            <a:off x="841248" y="3154680"/>
+            <a:ext cx="10479024" cy="310896"/>
           </a:xfrm>
           <a:prstGeom prst="rect">
             <a:avLst/>
@@ -3912,7 +3912,7 @@
               <a:buNone/>
             </a:pPr>
             <a:r>
-              <a:rPr lang="en-US" sz="1300" dirty="0">
+              <a:rPr lang="en-US" sz="1250" dirty="0">
                 <a:solidFill>
                   <a:srgbClr val="E8EEF7"/>
                 </a:solidFill>
@@ -3922,7 +3922,7 @@
               </a:rPr>
               <a:t>Troque a senha do usuário inicial admin@scseduca.com.br no primeiro acesso.</a:t>
             </a:r>
-            <a:endParaRPr lang="en-US" sz="1300" dirty="0"/>
+            <a:endParaRPr lang="en-US" sz="1250" dirty="0"/>
           </a:p>
         </p:txBody>
       </p:sp>
@@ -3934,12 +3934,12 @@
         </p:nvSpPr>
         <p:spPr>
           <a:xfrm>
-            <a:off x="640080" y="4032504"/>
-            <a:ext cx="10881360" cy="1024128"/>
+            <a:off x="640080" y="3712464"/>
+            <a:ext cx="10881360" cy="914400"/>
           </a:xfrm>
           <a:prstGeom prst="roundRect">
             <a:avLst>
-              <a:gd name="adj" fmla="val 8036"/>
+              <a:gd name="adj" fmla="val 9000"/>
             </a:avLst>
           </a:prstGeom>
           <a:solidFill>
@@ -3961,7 +3961,7 @@
         </p:nvSpPr>
         <p:spPr>
           <a:xfrm>
-            <a:off x="841248" y="4178808"/>
+            <a:off x="841248" y="3858768"/>
             <a:ext cx="10479024" cy="329184"/>
           </a:xfrm>
           <a:prstGeom prst="rect">
@@ -4000,8 +4000,8 @@
         </p:nvSpPr>
         <p:spPr>
           <a:xfrm>
-            <a:off x="841248" y="4507992"/>
-            <a:ext cx="10479024" cy="420624"/>
+            <a:off x="841248" y="4187952"/>
+            <a:ext cx="10479024" cy="310896"/>
           </a:xfrm>
           <a:prstGeom prst="rect">
             <a:avLst/>
@@ -4020,7 +4020,7 @@
               <a:buNone/>
             </a:pPr>
             <a:r>
-              <a:rPr lang="en-US" sz="1300" dirty="0">
+              <a:rPr lang="en-US" sz="1250" dirty="0">
                 <a:solidFill>
                   <a:srgbClr val="E8EEF7"/>
                 </a:solidFill>
@@ -4030,7 +4030,7 @@
               </a:rPr>
               <a:t>Colunas, status e transições mudam NA HORA para todos.</a:t>
             </a:r>
-            <a:endParaRPr lang="en-US" sz="1300" dirty="0"/>
+            <a:endParaRPr lang="en-US" sz="1250" dirty="0"/>
           </a:p>
         </p:txBody>
       </p:sp>
@@ -4042,12 +4042,12 @@
         </p:nvSpPr>
         <p:spPr>
           <a:xfrm>
-            <a:off x="640080" y="5202936"/>
-            <a:ext cx="10881360" cy="1024128"/>
+            <a:off x="640080" y="4745736"/>
+            <a:ext cx="10881360" cy="914400"/>
           </a:xfrm>
           <a:prstGeom prst="roundRect">
             <a:avLst>
-              <a:gd name="adj" fmla="val 8036"/>
+              <a:gd name="adj" fmla="val 9000"/>
             </a:avLst>
           </a:prstGeom>
           <a:solidFill>
@@ -4069,7 +4069,7 @@
         </p:nvSpPr>
         <p:spPr>
           <a:xfrm>
-            <a:off x="841248" y="5349240"/>
+            <a:off x="841248" y="4892040"/>
             <a:ext cx="10479024" cy="329184"/>
           </a:xfrm>
           <a:prstGeom prst="rect">
@@ -4108,8 +4108,8 @@
         </p:nvSpPr>
         <p:spPr>
           <a:xfrm>
-            <a:off x="841248" y="5678424"/>
-            <a:ext cx="10479024" cy="420624"/>
+            <a:off x="841248" y="5221224"/>
+            <a:ext cx="10479024" cy="310896"/>
           </a:xfrm>
           <a:prstGeom prst="rect">
             <a:avLst/>
@@ -4128,7 +4128,7 @@
               <a:buNone/>
             </a:pPr>
             <a:r>
-              <a:rPr lang="en-US" sz="1300" dirty="0">
+              <a:rPr lang="en-US" sz="1250" dirty="0">
                 <a:solidFill>
                   <a:srgbClr val="E8EEF7"/>
                 </a:solidFill>
@@ -4138,7 +4138,7 @@
               </a:rPr>
               <a:t>Olhe a Auditoria e a fila de Notificações — erros de e-mail aparecem lá primeiro.</a:t>
             </a:r>
-            <a:endParaRPr lang="en-US" sz="1300" dirty="0"/>
+            <a:endParaRPr lang="en-US" sz="1250" dirty="0"/>
           </a:p>
         </p:txBody>
       </p:sp>
@@ -4150,24 +4150,24 @@
         </p:nvSpPr>
         <p:spPr>
           <a:xfrm>
-            <a:off x="640080" y="5943600"/>
-            <a:ext cx="10058400" cy="365760"/>
-          </a:xfrm>
-          <a:prstGeom prst="rect">
-            <a:avLst/>
-          </a:prstGeom>
-          <a:noFill/>
-          <a:ln/>
-        </p:spPr>
-        <p:txBody>
-          <a:bodyPr wrap="square" lIns="0" tIns="0" rIns="0" bIns="0" rtlCol="0" anchor="ctr"/>
-          <a:lstStyle/>
-          <a:p>
-            <a:pPr indent="0" marL="0">
-              <a:buNone/>
-            </a:pPr>
-            <a:r>
-              <a:rPr lang="en-US" sz="1600" dirty="0">
+            <a:off x="640080" y="5989320"/>
+            <a:ext cx="10058400" cy="347472"/>
+          </a:xfrm>
+          <a:prstGeom prst="rect">
+            <a:avLst/>
+          </a:prstGeom>
+          <a:noFill/>
+          <a:ln/>
+        </p:spPr>
+        <p:txBody>
+          <a:bodyPr wrap="square" lIns="0" tIns="0" rIns="0" bIns="0" rtlCol="0" anchor="ctr"/>
+          <a:lstStyle/>
+          <a:p>
+            <a:pPr indent="0" marL="0">
+              <a:buNone/>
+            </a:pPr>
+            <a:r>
+              <a:rPr lang="en-US" sz="1500" dirty="0">
                 <a:solidFill>
                   <a:srgbClr val="8BAAC8"/>
                 </a:solidFill>
@@ -4181,7 +4181,7 @@
               <a:buNone/>
             </a:pPr>
             <a:r>
-              <a:rPr lang="en-US" sz="1600" b="1" dirty="0">
+              <a:rPr lang="en-US" sz="1500" b="1" dirty="0">
                 <a:solidFill>
                   <a:srgbClr val="22D3EE"/>
                 </a:solidFill>
@@ -4191,7 +4191,7 @@
               </a:rPr>
               <a:t>ti.cecape@scseduca.com.br</a:t>
             </a:r>
-            <a:endParaRPr lang="en-US" sz="1600" dirty="0"/>
+            <a:endParaRPr lang="en-US" sz="1500" dirty="0"/>
           </a:p>
         </p:txBody>
       </p:sp>
@@ -5403,12 +5403,12 @@
         </p:nvSpPr>
         <p:spPr>
           <a:xfrm>
-            <a:off x="839677" y="1554480"/>
-            <a:ext cx="2344006" cy="4480560"/>
+            <a:off x="726229" y="1554480"/>
+            <a:ext cx="2570901" cy="4480560"/>
           </a:xfrm>
           <a:prstGeom prst="roundRect">
             <a:avLst>
-              <a:gd name="adj" fmla="val 3511"/>
+              <a:gd name="adj" fmla="val 3201"/>
             </a:avLst>
           </a:prstGeom>
           <a:solidFill>
@@ -5438,8 +5438,8 @@
         </p:blipFill>
         <p:spPr>
           <a:xfrm>
-            <a:off x="949405" y="1664208"/>
-            <a:ext cx="2124550" cy="4261104"/>
+            <a:off x="835957" y="1664208"/>
+            <a:ext cx="2351445" cy="4261104"/>
           </a:xfrm>
           <a:prstGeom prst="rect">
             <a:avLst/>
@@ -7178,7 +7178,7 @@
         <p:spPr>
           <a:xfrm>
             <a:off x="1097280" y="1737360"/>
-            <a:ext cx="5212080" cy="713232"/>
+            <a:ext cx="5212080" cy="484632"/>
           </a:xfrm>
           <a:prstGeom prst="rect">
             <a:avLst/>
@@ -7230,7 +7230,7 @@
         </p:nvSpPr>
         <p:spPr>
           <a:xfrm>
-            <a:off x="640080" y="2496312"/>
+            <a:off x="640080" y="2267712"/>
             <a:ext cx="310896" cy="310896"/>
           </a:xfrm>
           <a:prstGeom prst="ellipse">
@@ -7250,7 +7250,7 @@
         </p:nvSpPr>
         <p:spPr>
           <a:xfrm>
-            <a:off x="640080" y="2496312"/>
+            <a:off x="640080" y="2267712"/>
             <a:ext cx="310896" cy="310896"/>
           </a:xfrm>
           <a:prstGeom prst="rect">
@@ -7289,8 +7289,8 @@
         </p:nvSpPr>
         <p:spPr>
           <a:xfrm>
-            <a:off x="1097280" y="2450592"/>
-            <a:ext cx="5212080" cy="713232"/>
+            <a:off x="1097280" y="2221992"/>
+            <a:ext cx="5212080" cy="484632"/>
           </a:xfrm>
           <a:prstGeom prst="rect">
             <a:avLst/>
@@ -7342,7 +7342,7 @@
         </p:nvSpPr>
         <p:spPr>
           <a:xfrm>
-            <a:off x="640080" y="3209544"/>
+            <a:off x="640080" y="2752344"/>
             <a:ext cx="310896" cy="310896"/>
           </a:xfrm>
           <a:prstGeom prst="ellipse">
@@ -7362,7 +7362,7 @@
         </p:nvSpPr>
         <p:spPr>
           <a:xfrm>
-            <a:off x="640080" y="3209544"/>
+            <a:off x="640080" y="2752344"/>
             <a:ext cx="310896" cy="310896"/>
           </a:xfrm>
           <a:prstGeom prst="rect">
@@ -7401,8 +7401,8 @@
         </p:nvSpPr>
         <p:spPr>
           <a:xfrm>
-            <a:off x="1097280" y="3163824"/>
-            <a:ext cx="5212080" cy="713232"/>
+            <a:off x="1097280" y="2706624"/>
+            <a:ext cx="5212080" cy="484632"/>
           </a:xfrm>
           <a:prstGeom prst="rect">
             <a:avLst/>
@@ -7454,7 +7454,7 @@
         </p:nvSpPr>
         <p:spPr>
           <a:xfrm>
-            <a:off x="640080" y="3922776"/>
+            <a:off x="640080" y="3236976"/>
             <a:ext cx="310896" cy="310896"/>
           </a:xfrm>
           <a:prstGeom prst="ellipse">
@@ -7474,7 +7474,7 @@
         </p:nvSpPr>
         <p:spPr>
           <a:xfrm>
-            <a:off x="640080" y="3922776"/>
+            <a:off x="640080" y="3236976"/>
             <a:ext cx="310896" cy="310896"/>
           </a:xfrm>
           <a:prstGeom prst="rect">
@@ -7513,8 +7513,8 @@
         </p:nvSpPr>
         <p:spPr>
           <a:xfrm>
-            <a:off x="1097280" y="3877056"/>
-            <a:ext cx="5212080" cy="713232"/>
+            <a:off x="1097280" y="3191256"/>
+            <a:ext cx="5212080" cy="484632"/>
           </a:xfrm>
           <a:prstGeom prst="rect">
             <a:avLst/>
@@ -7566,7 +7566,7 @@
         </p:nvSpPr>
         <p:spPr>
           <a:xfrm>
-            <a:off x="640080" y="4636008"/>
+            <a:off x="640080" y="3721608"/>
             <a:ext cx="310896" cy="310896"/>
           </a:xfrm>
           <a:prstGeom prst="ellipse">
@@ -7586,7 +7586,7 @@
         </p:nvSpPr>
         <p:spPr>
           <a:xfrm>
-            <a:off x="640080" y="4636008"/>
+            <a:off x="640080" y="3721608"/>
             <a:ext cx="310896" cy="310896"/>
           </a:xfrm>
           <a:prstGeom prst="rect">
@@ -7625,8 +7625,8 @@
         </p:nvSpPr>
         <p:spPr>
           <a:xfrm>
-            <a:off x="1097280" y="4590288"/>
-            <a:ext cx="5212080" cy="713232"/>
+            <a:off x="1097280" y="3675888"/>
+            <a:ext cx="5212080" cy="484632"/>
           </a:xfrm>
           <a:prstGeom prst="rect">
             <a:avLst/>
@@ -7692,12 +7692,12 @@
         </p:nvSpPr>
         <p:spPr>
           <a:xfrm>
-            <a:off x="640080" y="5394960"/>
-            <a:ext cx="5669280" cy="914400"/>
+            <a:off x="6583680" y="1783080"/>
+            <a:ext cx="5029200" cy="2194560"/>
           </a:xfrm>
           <a:prstGeom prst="roundRect">
             <a:avLst>
-              <a:gd name="adj" fmla="val 9000"/>
+              <a:gd name="adj" fmla="val 3750"/>
             </a:avLst>
           </a:prstGeom>
           <a:solidFill>
@@ -7719,8 +7719,8 @@
         </p:nvSpPr>
         <p:spPr>
           <a:xfrm>
-            <a:off x="841248" y="5541264"/>
-            <a:ext cx="5266944" cy="329184"/>
+            <a:off x="6784848" y="1929384"/>
+            <a:ext cx="4626864" cy="329184"/>
           </a:xfrm>
           <a:prstGeom prst="rect">
             <a:avLst/>
@@ -7758,8 +7758,8 @@
         </p:nvSpPr>
         <p:spPr>
           <a:xfrm>
-            <a:off x="841248" y="5870448"/>
-            <a:ext cx="5266944" cy="310896"/>
+            <a:off x="6784848" y="2258568"/>
+            <a:ext cx="4626864" cy="1591056"/>
           </a:xfrm>
           <a:prstGeom prst="rect">
             <a:avLst/>
@@ -7778,7 +7778,7 @@
               <a:buNone/>
             </a:pPr>
             <a:r>
-              <a:rPr lang="en-US" sz="1200" dirty="0">
+              <a:rPr lang="en-US" sz="1300" dirty="0">
                 <a:solidFill>
                   <a:srgbClr val="E8EEF7"/>
                 </a:solidFill>
@@ -7786,9 +7786,38 @@
                 <a:ea typeface="Calibri" pitchFamily="34" charset="-122"/>
                 <a:cs typeface="Calibri" pitchFamily="34" charset="-120"/>
               </a:rPr>
-              <a:t>Editar, Redefinir senha e a chave Ativo — desativar impede o login sem apagar o histórico.</a:t>
-            </a:r>
-            <a:endParaRPr lang="en-US" sz="1200" dirty="0"/>
+              <a:t>Editar, Redefinir senha e a chave Ativo — desativar impede o login sem apagar o histórico do usuário.</a:t>
+            </a:r>
+            <a:endParaRPr lang="en-US" sz="1300" dirty="0"/>
+          </a:p>
+          <a:p>
+            <a:pPr indent="0" marL="0">
+              <a:lnSpc>
+                <a:spcPct val="112000"/>
+              </a:lnSpc>
+              <a:buNone/>
+            </a:pPr>
+            <a:endParaRPr lang="en-US" sz="1300" dirty="0"/>
+          </a:p>
+          <a:p>
+            <a:pPr indent="0" marL="0">
+              <a:lnSpc>
+                <a:spcPct val="112000"/>
+              </a:lnSpc>
+              <a:buNone/>
+            </a:pPr>
+            <a:r>
+              <a:rPr lang="en-US" sz="1300" dirty="0">
+                <a:solidFill>
+                  <a:srgbClr val="E8EEF7"/>
+                </a:solidFill>
+                <a:latin typeface="Calibri" pitchFamily="34" charset="0"/>
+                <a:ea typeface="Calibri" pitchFamily="34" charset="-122"/>
+                <a:cs typeface="Calibri" pitchFamily="34" charset="-120"/>
+              </a:rPr>
+              <a:t>A busca tem autocompletar com os nomes cadastrados.</a:t>
+            </a:r>
+            <a:endParaRPr lang="en-US" sz="1300" dirty="0"/>
           </a:p>
         </p:txBody>
       </p:sp>
@@ -7800,12 +7829,12 @@
         </p:nvSpPr>
         <p:spPr>
           <a:xfrm>
-            <a:off x="6583680" y="1645920"/>
-            <a:ext cx="5029200" cy="823866"/>
+            <a:off x="1879092" y="4343400"/>
+            <a:ext cx="8494776" cy="1874520"/>
           </a:xfrm>
           <a:prstGeom prst="roundRect">
             <a:avLst>
-              <a:gd name="adj" fmla="val 9989"/>
+              <a:gd name="adj" fmla="val 4390"/>
             </a:avLst>
           </a:prstGeom>
           <a:solidFill>
@@ -7835,8 +7864,8 @@
         </p:blipFill>
         <p:spPr>
           <a:xfrm>
-            <a:off x="6693408" y="1755648"/>
-            <a:ext cx="4809744" cy="604410"/>
+            <a:off x="1988820" y="4453128"/>
+            <a:ext cx="8275320" cy="1655064"/>
           </a:xfrm>
           <a:prstGeom prst="rect">
             <a:avLst/>
